--- a/2026_Б_ПІ_ПЗПІ-22-9_М'яч_К_О.pptx
+++ b/2026_Б_ПІ_ПЗПІ-22-9_М'яч_К_О.pptx
@@ -5,7 +5,7 @@
     <p:sldMasterId id="2147483659" r:id="rId1"/>
   </p:sldMasterIdLst>
   <p:notesMasterIdLst>
-    <p:notesMasterId r:id="rId15"/>
+    <p:notesMasterId r:id="rId16"/>
   </p:notesMasterIdLst>
   <p:sldIdLst>
     <p:sldId id="256" r:id="rId2"/>
@@ -13,31 +13,32 @@
     <p:sldId id="258" r:id="rId4"/>
     <p:sldId id="259" r:id="rId5"/>
     <p:sldId id="260" r:id="rId6"/>
-    <p:sldId id="261" r:id="rId7"/>
-    <p:sldId id="262" r:id="rId8"/>
-    <p:sldId id="263" r:id="rId9"/>
-    <p:sldId id="264" r:id="rId10"/>
-    <p:sldId id="273" r:id="rId11"/>
-    <p:sldId id="271" r:id="rId12"/>
-    <p:sldId id="268" r:id="rId13"/>
-    <p:sldId id="267" r:id="rId14"/>
+    <p:sldId id="275" r:id="rId7"/>
+    <p:sldId id="276" r:id="rId8"/>
+    <p:sldId id="277" r:id="rId9"/>
+    <p:sldId id="261" r:id="rId10"/>
+    <p:sldId id="264" r:id="rId11"/>
+    <p:sldId id="273" r:id="rId12"/>
+    <p:sldId id="271" r:id="rId13"/>
+    <p:sldId id="268" r:id="rId14"/>
+    <p:sldId id="267" r:id="rId15"/>
   </p:sldIdLst>
   <p:sldSz cx="9144000" cy="5143500" type="screen16x9"/>
   <p:notesSz cx="6858000" cy="9144000"/>
   <p:embeddedFontLst>
     <p:embeddedFont>
       <p:font typeface="Economica" panose="020B0604020202020204" charset="0"/>
-      <p:regular r:id="rId16"/>
-      <p:bold r:id="rId17"/>
-      <p:italic r:id="rId18"/>
-      <p:boldItalic r:id="rId19"/>
+      <p:regular r:id="rId17"/>
+      <p:bold r:id="rId18"/>
+      <p:italic r:id="rId19"/>
+      <p:boldItalic r:id="rId20"/>
     </p:embeddedFont>
     <p:embeddedFont>
       <p:font typeface="Open Sans" panose="020B0606030504020204" pitchFamily="34" charset="0"/>
-      <p:regular r:id="rId20"/>
-      <p:bold r:id="rId21"/>
-      <p:italic r:id="rId22"/>
-      <p:boldItalic r:id="rId23"/>
+      <p:regular r:id="rId21"/>
+      <p:bold r:id="rId22"/>
+      <p:italic r:id="rId23"/>
+      <p:boldItalic r:id="rId24"/>
     </p:embeddedFont>
   </p:embeddedFontLst>
   <p:defaultTextStyle>
@@ -930,16 +931,11 @@
               </a:spcAft>
               <a:buNone/>
             </a:pPr>
-            <a:endParaRPr/>
+            <a:endParaRPr dirty="0"/>
           </a:p>
         </p:txBody>
       </p:sp>
     </p:spTree>
-    <p:extLst>
-      <p:ext uri="{BB962C8B-B14F-4D97-AF65-F5344CB8AC3E}">
-        <p14:creationId xmlns:p14="http://schemas.microsoft.com/office/powerpoint/2010/main" val="3161969775"/>
-      </p:ext>
-    </p:extLst>
   </p:cSld>
   <p:clrMapOvr>
     <a:masterClrMapping/>
@@ -1039,7 +1035,116 @@
               </a:spcAft>
               <a:buNone/>
             </a:pPr>
-            <a:endParaRPr/>
+            <a:endParaRPr dirty="0"/>
+          </a:p>
+        </p:txBody>
+      </p:sp>
+    </p:spTree>
+    <p:extLst>
+      <p:ext uri="{BB962C8B-B14F-4D97-AF65-F5344CB8AC3E}">
+        <p14:creationId xmlns:p14="http://schemas.microsoft.com/office/powerpoint/2010/main" val="3161969775"/>
+      </p:ext>
+    </p:extLst>
+  </p:cSld>
+  <p:clrMapOvr>
+    <a:masterClrMapping/>
+  </p:clrMapOvr>
+</p:notes>
+</file>
+
+<file path=ppt/notesSlides/notesSlide12.xml><?xml version="1.0" encoding="utf-8"?>
+<p:notes xmlns:a="http://schemas.openxmlformats.org/drawingml/2006/main" xmlns:r="http://schemas.openxmlformats.org/officeDocument/2006/relationships" xmlns:p="http://schemas.openxmlformats.org/presentationml/2006/main" showMasterSp="0" showMasterPhAnim="0">
+  <p:cSld>
+    <p:spTree>
+      <p:nvGrpSpPr>
+        <p:cNvPr id="1" name="Shape 116"/>
+        <p:cNvGrpSpPr/>
+        <p:nvPr/>
+      </p:nvGrpSpPr>
+      <p:grpSpPr>
+        <a:xfrm>
+          <a:off x="0" y="0"/>
+          <a:ext cx="0" cy="0"/>
+          <a:chOff x="0" y="0"/>
+          <a:chExt cx="0" cy="0"/>
+        </a:xfrm>
+      </p:grpSpPr>
+      <p:sp>
+        <p:nvSpPr>
+          <p:cNvPr id="117" name="Google Shape;117;g2e16b2adad1_0_35:notes"/>
+          <p:cNvSpPr>
+            <a:spLocks noGrp="1" noRot="1" noChangeAspect="1"/>
+          </p:cNvSpPr>
+          <p:nvPr>
+            <p:ph type="sldImg" idx="2"/>
+          </p:nvPr>
+        </p:nvSpPr>
+        <p:spPr>
+          <a:xfrm>
+            <a:off x="381000" y="685800"/>
+            <a:ext cx="6096000" cy="3429000"/>
+          </a:xfrm>
+          <a:custGeom>
+            <a:avLst/>
+            <a:gdLst/>
+            <a:ahLst/>
+            <a:cxnLst/>
+            <a:rect l="l" t="t" r="r" b="b"/>
+            <a:pathLst>
+              <a:path w="120000" h="120000" extrusionOk="0">
+                <a:moveTo>
+                  <a:pt x="0" y="0"/>
+                </a:moveTo>
+                <a:lnTo>
+                  <a:pt x="120000" y="0"/>
+                </a:lnTo>
+                <a:lnTo>
+                  <a:pt x="120000" y="120000"/>
+                </a:lnTo>
+                <a:lnTo>
+                  <a:pt x="0" y="120000"/>
+                </a:lnTo>
+                <a:close/>
+              </a:path>
+            </a:pathLst>
+          </a:custGeom>
+        </p:spPr>
+      </p:sp>
+      <p:sp>
+        <p:nvSpPr>
+          <p:cNvPr id="118" name="Google Shape;118;g2e16b2adad1_0_35:notes"/>
+          <p:cNvSpPr txBox="1">
+            <a:spLocks noGrp="1"/>
+          </p:cNvSpPr>
+          <p:nvPr>
+            <p:ph type="body" idx="1"/>
+          </p:nvPr>
+        </p:nvSpPr>
+        <p:spPr>
+          <a:xfrm>
+            <a:off x="685800" y="4343400"/>
+            <a:ext cx="5486400" cy="4114800"/>
+          </a:xfrm>
+          <a:prstGeom prst="rect">
+            <a:avLst/>
+          </a:prstGeom>
+        </p:spPr>
+        <p:txBody>
+          <a:bodyPr spcFirstLastPara="1" wrap="square" lIns="91425" tIns="91425" rIns="91425" bIns="91425" anchor="t" anchorCtr="0">
+            <a:noAutofit/>
+          </a:bodyPr>
+          <a:lstStyle/>
+          <a:p>
+            <a:pPr marL="0" lvl="0" indent="0" algn="l" rtl="0">
+              <a:spcBef>
+                <a:spcPts val="0"/>
+              </a:spcBef>
+              <a:spcAft>
+                <a:spcPts val="0"/>
+              </a:spcAft>
+              <a:buNone/>
+            </a:pPr>
+            <a:endParaRPr dirty="0"/>
           </a:p>
         </p:txBody>
       </p:sp>
@@ -1056,7 +1161,7 @@
 </p:notes>
 </file>
 
-<file path=ppt/notesSlides/notesSlide12.xml><?xml version="1.0" encoding="utf-8"?>
+<file path=ppt/notesSlides/notesSlide13.xml><?xml version="1.0" encoding="utf-8"?>
 <p:notes xmlns:a="http://schemas.openxmlformats.org/drawingml/2006/main" xmlns:r="http://schemas.openxmlformats.org/officeDocument/2006/relationships" xmlns:p="http://schemas.openxmlformats.org/presentationml/2006/main" showMasterSp="0" showMasterPhAnim="0">
   <p:cSld>
     <p:spTree>
@@ -1148,7 +1253,7 @@
               </a:spcAft>
               <a:buNone/>
             </a:pPr>
-            <a:endParaRPr/>
+            <a:endParaRPr dirty="0"/>
           </a:p>
         </p:txBody>
       </p:sp>
@@ -1160,7 +1265,7 @@
 </p:notes>
 </file>
 
-<file path=ppt/notesSlides/notesSlide13.xml><?xml version="1.0" encoding="utf-8"?>
+<file path=ppt/notesSlides/notesSlide14.xml><?xml version="1.0" encoding="utf-8"?>
 <p:notes xmlns:a="http://schemas.openxmlformats.org/drawingml/2006/main" xmlns:r="http://schemas.openxmlformats.org/officeDocument/2006/relationships" xmlns:p="http://schemas.openxmlformats.org/presentationml/2006/main" showMasterSp="0" showMasterPhAnim="0">
   <p:cSld>
     <p:spTree>
@@ -1252,7 +1357,7 @@
               </a:spcAft>
               <a:buNone/>
             </a:pPr>
-            <a:endParaRPr/>
+            <a:endParaRPr dirty="0"/>
           </a:p>
         </p:txBody>
       </p:sp>
@@ -1356,7 +1461,7 @@
               </a:spcAft>
               <a:buNone/>
             </a:pPr>
-            <a:endParaRPr/>
+            <a:endParaRPr dirty="0"/>
           </a:p>
         </p:txBody>
       </p:sp>
@@ -1460,7 +1565,7 @@
               </a:spcAft>
               <a:buNone/>
             </a:pPr>
-            <a:endParaRPr/>
+            <a:endParaRPr dirty="0"/>
           </a:p>
         </p:txBody>
       </p:sp>
@@ -1668,7 +1773,7 @@
               </a:spcAft>
               <a:buNone/>
             </a:pPr>
-            <a:endParaRPr/>
+            <a:endParaRPr dirty="0"/>
           </a:p>
         </p:txBody>
       </p:sp>
@@ -1681,6 +1786,333 @@
 </file>
 
 <file path=ppt/notesSlides/notesSlide6.xml><?xml version="1.0" encoding="utf-8"?>
+<p:notes xmlns:a="http://schemas.openxmlformats.org/drawingml/2006/main" xmlns:r="http://schemas.openxmlformats.org/officeDocument/2006/relationships" xmlns:p="http://schemas.openxmlformats.org/presentationml/2006/main" showMasterSp="0" showMasterPhAnim="0">
+  <p:cSld>
+    <p:spTree>
+      <p:nvGrpSpPr>
+        <p:cNvPr id="1" name="Shape 116"/>
+        <p:cNvGrpSpPr/>
+        <p:nvPr/>
+      </p:nvGrpSpPr>
+      <p:grpSpPr>
+        <a:xfrm>
+          <a:off x="0" y="0"/>
+          <a:ext cx="0" cy="0"/>
+          <a:chOff x="0" y="0"/>
+          <a:chExt cx="0" cy="0"/>
+        </a:xfrm>
+      </p:grpSpPr>
+      <p:sp>
+        <p:nvSpPr>
+          <p:cNvPr id="117" name="Google Shape;117;g2e16b2adad1_0_35:notes"/>
+          <p:cNvSpPr>
+            <a:spLocks noGrp="1" noRot="1" noChangeAspect="1"/>
+          </p:cNvSpPr>
+          <p:nvPr>
+            <p:ph type="sldImg" idx="2"/>
+          </p:nvPr>
+        </p:nvSpPr>
+        <p:spPr>
+          <a:xfrm>
+            <a:off x="381000" y="685800"/>
+            <a:ext cx="6096000" cy="3429000"/>
+          </a:xfrm>
+          <a:custGeom>
+            <a:avLst/>
+            <a:gdLst/>
+            <a:ahLst/>
+            <a:cxnLst/>
+            <a:rect l="l" t="t" r="r" b="b"/>
+            <a:pathLst>
+              <a:path w="120000" h="120000" extrusionOk="0">
+                <a:moveTo>
+                  <a:pt x="0" y="0"/>
+                </a:moveTo>
+                <a:lnTo>
+                  <a:pt x="120000" y="0"/>
+                </a:lnTo>
+                <a:lnTo>
+                  <a:pt x="120000" y="120000"/>
+                </a:lnTo>
+                <a:lnTo>
+                  <a:pt x="0" y="120000"/>
+                </a:lnTo>
+                <a:close/>
+              </a:path>
+            </a:pathLst>
+          </a:custGeom>
+        </p:spPr>
+      </p:sp>
+      <p:sp>
+        <p:nvSpPr>
+          <p:cNvPr id="118" name="Google Shape;118;g2e16b2adad1_0_35:notes"/>
+          <p:cNvSpPr txBox="1">
+            <a:spLocks noGrp="1"/>
+          </p:cNvSpPr>
+          <p:nvPr>
+            <p:ph type="body" idx="1"/>
+          </p:nvPr>
+        </p:nvSpPr>
+        <p:spPr>
+          <a:xfrm>
+            <a:off x="685800" y="4343400"/>
+            <a:ext cx="5486400" cy="4114800"/>
+          </a:xfrm>
+          <a:prstGeom prst="rect">
+            <a:avLst/>
+          </a:prstGeom>
+        </p:spPr>
+        <p:txBody>
+          <a:bodyPr spcFirstLastPara="1" wrap="square" lIns="91425" tIns="91425" rIns="91425" bIns="91425" anchor="t" anchorCtr="0">
+            <a:noAutofit/>
+          </a:bodyPr>
+          <a:lstStyle/>
+          <a:p>
+            <a:pPr marL="0" lvl="0" indent="0" algn="l" rtl="0">
+              <a:spcBef>
+                <a:spcPts val="0"/>
+              </a:spcBef>
+              <a:spcAft>
+                <a:spcPts val="0"/>
+              </a:spcAft>
+              <a:buNone/>
+            </a:pPr>
+            <a:endParaRPr dirty="0"/>
+          </a:p>
+        </p:txBody>
+      </p:sp>
+    </p:spTree>
+    <p:extLst>
+      <p:ext uri="{BB962C8B-B14F-4D97-AF65-F5344CB8AC3E}">
+        <p14:creationId xmlns:p14="http://schemas.microsoft.com/office/powerpoint/2010/main" val="2154037200"/>
+      </p:ext>
+    </p:extLst>
+  </p:cSld>
+  <p:clrMapOvr>
+    <a:masterClrMapping/>
+  </p:clrMapOvr>
+</p:notes>
+</file>
+
+<file path=ppt/notesSlides/notesSlide7.xml><?xml version="1.0" encoding="utf-8"?>
+<p:notes xmlns:a="http://schemas.openxmlformats.org/drawingml/2006/main" xmlns:r="http://schemas.openxmlformats.org/officeDocument/2006/relationships" xmlns:p="http://schemas.openxmlformats.org/presentationml/2006/main" showMasterSp="0" showMasterPhAnim="0">
+  <p:cSld>
+    <p:spTree>
+      <p:nvGrpSpPr>
+        <p:cNvPr id="1" name="Shape 116"/>
+        <p:cNvGrpSpPr/>
+        <p:nvPr/>
+      </p:nvGrpSpPr>
+      <p:grpSpPr>
+        <a:xfrm>
+          <a:off x="0" y="0"/>
+          <a:ext cx="0" cy="0"/>
+          <a:chOff x="0" y="0"/>
+          <a:chExt cx="0" cy="0"/>
+        </a:xfrm>
+      </p:grpSpPr>
+      <p:sp>
+        <p:nvSpPr>
+          <p:cNvPr id="117" name="Google Shape;117;g2e16b2adad1_0_35:notes"/>
+          <p:cNvSpPr>
+            <a:spLocks noGrp="1" noRot="1" noChangeAspect="1"/>
+          </p:cNvSpPr>
+          <p:nvPr>
+            <p:ph type="sldImg" idx="2"/>
+          </p:nvPr>
+        </p:nvSpPr>
+        <p:spPr>
+          <a:xfrm>
+            <a:off x="381000" y="685800"/>
+            <a:ext cx="6096000" cy="3429000"/>
+          </a:xfrm>
+          <a:custGeom>
+            <a:avLst/>
+            <a:gdLst/>
+            <a:ahLst/>
+            <a:cxnLst/>
+            <a:rect l="l" t="t" r="r" b="b"/>
+            <a:pathLst>
+              <a:path w="120000" h="120000" extrusionOk="0">
+                <a:moveTo>
+                  <a:pt x="0" y="0"/>
+                </a:moveTo>
+                <a:lnTo>
+                  <a:pt x="120000" y="0"/>
+                </a:lnTo>
+                <a:lnTo>
+                  <a:pt x="120000" y="120000"/>
+                </a:lnTo>
+                <a:lnTo>
+                  <a:pt x="0" y="120000"/>
+                </a:lnTo>
+                <a:close/>
+              </a:path>
+            </a:pathLst>
+          </a:custGeom>
+        </p:spPr>
+      </p:sp>
+      <p:sp>
+        <p:nvSpPr>
+          <p:cNvPr id="118" name="Google Shape;118;g2e16b2adad1_0_35:notes"/>
+          <p:cNvSpPr txBox="1">
+            <a:spLocks noGrp="1"/>
+          </p:cNvSpPr>
+          <p:nvPr>
+            <p:ph type="body" idx="1"/>
+          </p:nvPr>
+        </p:nvSpPr>
+        <p:spPr>
+          <a:xfrm>
+            <a:off x="685800" y="4343400"/>
+            <a:ext cx="5486400" cy="4114800"/>
+          </a:xfrm>
+          <a:prstGeom prst="rect">
+            <a:avLst/>
+          </a:prstGeom>
+        </p:spPr>
+        <p:txBody>
+          <a:bodyPr spcFirstLastPara="1" wrap="square" lIns="91425" tIns="91425" rIns="91425" bIns="91425" anchor="t" anchorCtr="0">
+            <a:noAutofit/>
+          </a:bodyPr>
+          <a:lstStyle/>
+          <a:p>
+            <a:pPr marL="0" lvl="0" indent="0" algn="l" rtl="0">
+              <a:spcBef>
+                <a:spcPts val="0"/>
+              </a:spcBef>
+              <a:spcAft>
+                <a:spcPts val="0"/>
+              </a:spcAft>
+              <a:buNone/>
+            </a:pPr>
+            <a:endParaRPr dirty="0"/>
+          </a:p>
+        </p:txBody>
+      </p:sp>
+    </p:spTree>
+    <p:extLst>
+      <p:ext uri="{BB962C8B-B14F-4D97-AF65-F5344CB8AC3E}">
+        <p14:creationId xmlns:p14="http://schemas.microsoft.com/office/powerpoint/2010/main" val="2156132406"/>
+      </p:ext>
+    </p:extLst>
+  </p:cSld>
+  <p:clrMapOvr>
+    <a:masterClrMapping/>
+  </p:clrMapOvr>
+</p:notes>
+</file>
+
+<file path=ppt/notesSlides/notesSlide8.xml><?xml version="1.0" encoding="utf-8"?>
+<p:notes xmlns:a="http://schemas.openxmlformats.org/drawingml/2006/main" xmlns:r="http://schemas.openxmlformats.org/officeDocument/2006/relationships" xmlns:p="http://schemas.openxmlformats.org/presentationml/2006/main" showMasterSp="0" showMasterPhAnim="0">
+  <p:cSld>
+    <p:spTree>
+      <p:nvGrpSpPr>
+        <p:cNvPr id="1" name="Shape 116"/>
+        <p:cNvGrpSpPr/>
+        <p:nvPr/>
+      </p:nvGrpSpPr>
+      <p:grpSpPr>
+        <a:xfrm>
+          <a:off x="0" y="0"/>
+          <a:ext cx="0" cy="0"/>
+          <a:chOff x="0" y="0"/>
+          <a:chExt cx="0" cy="0"/>
+        </a:xfrm>
+      </p:grpSpPr>
+      <p:sp>
+        <p:nvSpPr>
+          <p:cNvPr id="117" name="Google Shape;117;g2e16b2adad1_0_35:notes"/>
+          <p:cNvSpPr>
+            <a:spLocks noGrp="1" noRot="1" noChangeAspect="1"/>
+          </p:cNvSpPr>
+          <p:nvPr>
+            <p:ph type="sldImg" idx="2"/>
+          </p:nvPr>
+        </p:nvSpPr>
+        <p:spPr>
+          <a:xfrm>
+            <a:off x="381000" y="685800"/>
+            <a:ext cx="6096000" cy="3429000"/>
+          </a:xfrm>
+          <a:custGeom>
+            <a:avLst/>
+            <a:gdLst/>
+            <a:ahLst/>
+            <a:cxnLst/>
+            <a:rect l="l" t="t" r="r" b="b"/>
+            <a:pathLst>
+              <a:path w="120000" h="120000" extrusionOk="0">
+                <a:moveTo>
+                  <a:pt x="0" y="0"/>
+                </a:moveTo>
+                <a:lnTo>
+                  <a:pt x="120000" y="0"/>
+                </a:lnTo>
+                <a:lnTo>
+                  <a:pt x="120000" y="120000"/>
+                </a:lnTo>
+                <a:lnTo>
+                  <a:pt x="0" y="120000"/>
+                </a:lnTo>
+                <a:close/>
+              </a:path>
+            </a:pathLst>
+          </a:custGeom>
+        </p:spPr>
+      </p:sp>
+      <p:sp>
+        <p:nvSpPr>
+          <p:cNvPr id="118" name="Google Shape;118;g2e16b2adad1_0_35:notes"/>
+          <p:cNvSpPr txBox="1">
+            <a:spLocks noGrp="1"/>
+          </p:cNvSpPr>
+          <p:nvPr>
+            <p:ph type="body" idx="1"/>
+          </p:nvPr>
+        </p:nvSpPr>
+        <p:spPr>
+          <a:xfrm>
+            <a:off x="685800" y="4343400"/>
+            <a:ext cx="5486400" cy="4114800"/>
+          </a:xfrm>
+          <a:prstGeom prst="rect">
+            <a:avLst/>
+          </a:prstGeom>
+        </p:spPr>
+        <p:txBody>
+          <a:bodyPr spcFirstLastPara="1" wrap="square" lIns="91425" tIns="91425" rIns="91425" bIns="91425" anchor="t" anchorCtr="0">
+            <a:noAutofit/>
+          </a:bodyPr>
+          <a:lstStyle/>
+          <a:p>
+            <a:pPr marL="0" lvl="0" indent="0" algn="l" rtl="0">
+              <a:spcBef>
+                <a:spcPts val="0"/>
+              </a:spcBef>
+              <a:spcAft>
+                <a:spcPts val="0"/>
+              </a:spcAft>
+              <a:buNone/>
+            </a:pPr>
+            <a:endParaRPr dirty="0"/>
+          </a:p>
+        </p:txBody>
+      </p:sp>
+    </p:spTree>
+    <p:extLst>
+      <p:ext uri="{BB962C8B-B14F-4D97-AF65-F5344CB8AC3E}">
+        <p14:creationId xmlns:p14="http://schemas.microsoft.com/office/powerpoint/2010/main" val="1067515112"/>
+      </p:ext>
+    </p:extLst>
+  </p:cSld>
+  <p:clrMapOvr>
+    <a:masterClrMapping/>
+  </p:clrMapOvr>
+</p:notes>
+</file>
+
+<file path=ppt/notesSlides/notesSlide9.xml><?xml version="1.0" encoding="utf-8"?>
 <p:notes xmlns:a="http://schemas.openxmlformats.org/drawingml/2006/main" xmlns:r="http://schemas.openxmlformats.org/officeDocument/2006/relationships" xmlns:p="http://schemas.openxmlformats.org/presentationml/2006/main" showMasterSp="0" showMasterPhAnim="0">
   <p:cSld>
     <p:spTree>
@@ -1772,319 +2204,7 @@
               </a:spcAft>
               <a:buNone/>
             </a:pPr>
-            <a:endParaRPr/>
-          </a:p>
-        </p:txBody>
-      </p:sp>
-    </p:spTree>
-  </p:cSld>
-  <p:clrMapOvr>
-    <a:masterClrMapping/>
-  </p:clrMapOvr>
-</p:notes>
-</file>
-
-<file path=ppt/notesSlides/notesSlide7.xml><?xml version="1.0" encoding="utf-8"?>
-<p:notes xmlns:a="http://schemas.openxmlformats.org/drawingml/2006/main" xmlns:r="http://schemas.openxmlformats.org/officeDocument/2006/relationships" xmlns:p="http://schemas.openxmlformats.org/presentationml/2006/main" showMasterSp="0" showMasterPhAnim="0">
-  <p:cSld>
-    <p:spTree>
-      <p:nvGrpSpPr>
-        <p:cNvPr id="1" name="Shape 102"/>
-        <p:cNvGrpSpPr/>
-        <p:nvPr/>
-      </p:nvGrpSpPr>
-      <p:grpSpPr>
-        <a:xfrm>
-          <a:off x="0" y="0"/>
-          <a:ext cx="0" cy="0"/>
-          <a:chOff x="0" y="0"/>
-          <a:chExt cx="0" cy="0"/>
-        </a:xfrm>
-      </p:grpSpPr>
-      <p:sp>
-        <p:nvSpPr>
-          <p:cNvPr id="103" name="Google Shape;103;g2e16b2adad1_0_24:notes"/>
-          <p:cNvSpPr>
-            <a:spLocks noGrp="1" noRot="1" noChangeAspect="1"/>
-          </p:cNvSpPr>
-          <p:nvPr>
-            <p:ph type="sldImg" idx="2"/>
-          </p:nvPr>
-        </p:nvSpPr>
-        <p:spPr>
-          <a:xfrm>
-            <a:off x="381000" y="685800"/>
-            <a:ext cx="6096000" cy="3429000"/>
-          </a:xfrm>
-          <a:custGeom>
-            <a:avLst/>
-            <a:gdLst/>
-            <a:ahLst/>
-            <a:cxnLst/>
-            <a:rect l="l" t="t" r="r" b="b"/>
-            <a:pathLst>
-              <a:path w="120000" h="120000" extrusionOk="0">
-                <a:moveTo>
-                  <a:pt x="0" y="0"/>
-                </a:moveTo>
-                <a:lnTo>
-                  <a:pt x="120000" y="0"/>
-                </a:lnTo>
-                <a:lnTo>
-                  <a:pt x="120000" y="120000"/>
-                </a:lnTo>
-                <a:lnTo>
-                  <a:pt x="0" y="120000"/>
-                </a:lnTo>
-                <a:close/>
-              </a:path>
-            </a:pathLst>
-          </a:custGeom>
-        </p:spPr>
-      </p:sp>
-      <p:sp>
-        <p:nvSpPr>
-          <p:cNvPr id="104" name="Google Shape;104;g2e16b2adad1_0_24:notes"/>
-          <p:cNvSpPr txBox="1">
-            <a:spLocks noGrp="1"/>
-          </p:cNvSpPr>
-          <p:nvPr>
-            <p:ph type="body" idx="1"/>
-          </p:nvPr>
-        </p:nvSpPr>
-        <p:spPr>
-          <a:xfrm>
-            <a:off x="685800" y="4343400"/>
-            <a:ext cx="5486400" cy="4114800"/>
-          </a:xfrm>
-          <a:prstGeom prst="rect">
-            <a:avLst/>
-          </a:prstGeom>
-        </p:spPr>
-        <p:txBody>
-          <a:bodyPr spcFirstLastPara="1" wrap="square" lIns="91425" tIns="91425" rIns="91425" bIns="91425" anchor="t" anchorCtr="0">
-            <a:noAutofit/>
-          </a:bodyPr>
-          <a:lstStyle/>
-          <a:p>
-            <a:pPr marL="0" lvl="0" indent="0" algn="l" rtl="0">
-              <a:spcBef>
-                <a:spcPts val="0"/>
-              </a:spcBef>
-              <a:spcAft>
-                <a:spcPts val="0"/>
-              </a:spcAft>
-              <a:buNone/>
-            </a:pPr>
             <a:endParaRPr dirty="0"/>
-          </a:p>
-        </p:txBody>
-      </p:sp>
-    </p:spTree>
-  </p:cSld>
-  <p:clrMapOvr>
-    <a:masterClrMapping/>
-  </p:clrMapOvr>
-</p:notes>
-</file>
-
-<file path=ppt/notesSlides/notesSlide8.xml><?xml version="1.0" encoding="utf-8"?>
-<p:notes xmlns:a="http://schemas.openxmlformats.org/drawingml/2006/main" xmlns:r="http://schemas.openxmlformats.org/officeDocument/2006/relationships" xmlns:p="http://schemas.openxmlformats.org/presentationml/2006/main" showMasterSp="0" showMasterPhAnim="0">
-  <p:cSld>
-    <p:spTree>
-      <p:nvGrpSpPr>
-        <p:cNvPr id="1" name="Shape 109"/>
-        <p:cNvGrpSpPr/>
-        <p:nvPr/>
-      </p:nvGrpSpPr>
-      <p:grpSpPr>
-        <a:xfrm>
-          <a:off x="0" y="0"/>
-          <a:ext cx="0" cy="0"/>
-          <a:chOff x="0" y="0"/>
-          <a:chExt cx="0" cy="0"/>
-        </a:xfrm>
-      </p:grpSpPr>
-      <p:sp>
-        <p:nvSpPr>
-          <p:cNvPr id="110" name="Google Shape;110;g2e16b2adad1_0_30:notes"/>
-          <p:cNvSpPr>
-            <a:spLocks noGrp="1" noRot="1" noChangeAspect="1"/>
-          </p:cNvSpPr>
-          <p:nvPr>
-            <p:ph type="sldImg" idx="2"/>
-          </p:nvPr>
-        </p:nvSpPr>
-        <p:spPr>
-          <a:xfrm>
-            <a:off x="381000" y="685800"/>
-            <a:ext cx="6096000" cy="3429000"/>
-          </a:xfrm>
-          <a:custGeom>
-            <a:avLst/>
-            <a:gdLst/>
-            <a:ahLst/>
-            <a:cxnLst/>
-            <a:rect l="l" t="t" r="r" b="b"/>
-            <a:pathLst>
-              <a:path w="120000" h="120000" extrusionOk="0">
-                <a:moveTo>
-                  <a:pt x="0" y="0"/>
-                </a:moveTo>
-                <a:lnTo>
-                  <a:pt x="120000" y="0"/>
-                </a:lnTo>
-                <a:lnTo>
-                  <a:pt x="120000" y="120000"/>
-                </a:lnTo>
-                <a:lnTo>
-                  <a:pt x="0" y="120000"/>
-                </a:lnTo>
-                <a:close/>
-              </a:path>
-            </a:pathLst>
-          </a:custGeom>
-        </p:spPr>
-      </p:sp>
-      <p:sp>
-        <p:nvSpPr>
-          <p:cNvPr id="111" name="Google Shape;111;g2e16b2adad1_0_30:notes"/>
-          <p:cNvSpPr txBox="1">
-            <a:spLocks noGrp="1"/>
-          </p:cNvSpPr>
-          <p:nvPr>
-            <p:ph type="body" idx="1"/>
-          </p:nvPr>
-        </p:nvSpPr>
-        <p:spPr>
-          <a:xfrm>
-            <a:off x="685800" y="4343400"/>
-            <a:ext cx="5486400" cy="4114800"/>
-          </a:xfrm>
-          <a:prstGeom prst="rect">
-            <a:avLst/>
-          </a:prstGeom>
-        </p:spPr>
-        <p:txBody>
-          <a:bodyPr spcFirstLastPara="1" wrap="square" lIns="91425" tIns="91425" rIns="91425" bIns="91425" anchor="t" anchorCtr="0">
-            <a:noAutofit/>
-          </a:bodyPr>
-          <a:lstStyle/>
-          <a:p>
-            <a:pPr marL="0" lvl="0" indent="0" algn="l" rtl="0">
-              <a:spcBef>
-                <a:spcPts val="0"/>
-              </a:spcBef>
-              <a:spcAft>
-                <a:spcPts val="0"/>
-              </a:spcAft>
-              <a:buNone/>
-            </a:pPr>
-            <a:endParaRPr/>
-          </a:p>
-        </p:txBody>
-      </p:sp>
-    </p:spTree>
-  </p:cSld>
-  <p:clrMapOvr>
-    <a:masterClrMapping/>
-  </p:clrMapOvr>
-</p:notes>
-</file>
-
-<file path=ppt/notesSlides/notesSlide9.xml><?xml version="1.0" encoding="utf-8"?>
-<p:notes xmlns:a="http://schemas.openxmlformats.org/drawingml/2006/main" xmlns:r="http://schemas.openxmlformats.org/officeDocument/2006/relationships" xmlns:p="http://schemas.openxmlformats.org/presentationml/2006/main" showMasterSp="0" showMasterPhAnim="0">
-  <p:cSld>
-    <p:spTree>
-      <p:nvGrpSpPr>
-        <p:cNvPr id="1" name="Shape 116"/>
-        <p:cNvGrpSpPr/>
-        <p:nvPr/>
-      </p:nvGrpSpPr>
-      <p:grpSpPr>
-        <a:xfrm>
-          <a:off x="0" y="0"/>
-          <a:ext cx="0" cy="0"/>
-          <a:chOff x="0" y="0"/>
-          <a:chExt cx="0" cy="0"/>
-        </a:xfrm>
-      </p:grpSpPr>
-      <p:sp>
-        <p:nvSpPr>
-          <p:cNvPr id="117" name="Google Shape;117;g2e16b2adad1_0_35:notes"/>
-          <p:cNvSpPr>
-            <a:spLocks noGrp="1" noRot="1" noChangeAspect="1"/>
-          </p:cNvSpPr>
-          <p:nvPr>
-            <p:ph type="sldImg" idx="2"/>
-          </p:nvPr>
-        </p:nvSpPr>
-        <p:spPr>
-          <a:xfrm>
-            <a:off x="381000" y="685800"/>
-            <a:ext cx="6096000" cy="3429000"/>
-          </a:xfrm>
-          <a:custGeom>
-            <a:avLst/>
-            <a:gdLst/>
-            <a:ahLst/>
-            <a:cxnLst/>
-            <a:rect l="l" t="t" r="r" b="b"/>
-            <a:pathLst>
-              <a:path w="120000" h="120000" extrusionOk="0">
-                <a:moveTo>
-                  <a:pt x="0" y="0"/>
-                </a:moveTo>
-                <a:lnTo>
-                  <a:pt x="120000" y="0"/>
-                </a:lnTo>
-                <a:lnTo>
-                  <a:pt x="120000" y="120000"/>
-                </a:lnTo>
-                <a:lnTo>
-                  <a:pt x="0" y="120000"/>
-                </a:lnTo>
-                <a:close/>
-              </a:path>
-            </a:pathLst>
-          </a:custGeom>
-        </p:spPr>
-      </p:sp>
-      <p:sp>
-        <p:nvSpPr>
-          <p:cNvPr id="118" name="Google Shape;118;g2e16b2adad1_0_35:notes"/>
-          <p:cNvSpPr txBox="1">
-            <a:spLocks noGrp="1"/>
-          </p:cNvSpPr>
-          <p:nvPr>
-            <p:ph type="body" idx="1"/>
-          </p:nvPr>
-        </p:nvSpPr>
-        <p:spPr>
-          <a:xfrm>
-            <a:off x="685800" y="4343400"/>
-            <a:ext cx="5486400" cy="4114800"/>
-          </a:xfrm>
-          <a:prstGeom prst="rect">
-            <a:avLst/>
-          </a:prstGeom>
-        </p:spPr>
-        <p:txBody>
-          <a:bodyPr spcFirstLastPara="1" wrap="square" lIns="91425" tIns="91425" rIns="91425" bIns="91425" anchor="t" anchorCtr="0">
-            <a:noAutofit/>
-          </a:bodyPr>
-          <a:lstStyle/>
-          <a:p>
-            <a:pPr marL="0" lvl="0" indent="0" algn="l" rtl="0">
-              <a:spcBef>
-                <a:spcPts val="0"/>
-              </a:spcBef>
-              <a:spcAft>
-                <a:spcPts val="0"/>
-              </a:spcAft>
-              <a:buNone/>
-            </a:pPr>
-            <a:endParaRPr/>
           </a:p>
         </p:txBody>
       </p:sp>
@@ -2621,7 +2741,7 @@
               <a:rPr lang="uk"/>
               <a:t>‹№›</a:t>
             </a:fld>
-            <a:endParaRPr/>
+            <a:endParaRPr dirty="0"/>
           </a:p>
         </p:txBody>
       </p:sp>
@@ -2686,7 +2806,7 @@
               </a:spcAft>
               <a:buNone/>
             </a:pPr>
-            <a:endParaRPr/>
+            <a:endParaRPr dirty="0"/>
           </a:p>
         </p:txBody>
       </p:sp>
@@ -3092,7 +3212,7 @@
               <a:rPr lang="uk"/>
               <a:t>‹№›</a:t>
             </a:fld>
-            <a:endParaRPr/>
+            <a:endParaRPr dirty="0"/>
           </a:p>
         </p:txBody>
       </p:sp>
@@ -3196,7 +3316,7 @@
               <a:rPr lang="uk"/>
               <a:t>‹№›</a:t>
             </a:fld>
-            <a:endParaRPr/>
+            <a:endParaRPr dirty="0"/>
           </a:p>
         </p:txBody>
       </p:sp>
@@ -3519,7 +3639,7 @@
               <a:rPr lang="uk"/>
               <a:t>‹№›</a:t>
             </a:fld>
-            <a:endParaRPr/>
+            <a:endParaRPr dirty="0"/>
           </a:p>
         </p:txBody>
       </p:sp>
@@ -3584,7 +3704,7 @@
               </a:spcAft>
               <a:buNone/>
             </a:pPr>
-            <a:endParaRPr/>
+            <a:endParaRPr dirty="0"/>
           </a:p>
         </p:txBody>
       </p:sp>
@@ -3929,7 +4049,7 @@
               <a:rPr lang="uk"/>
               <a:t>‹№›</a:t>
             </a:fld>
-            <a:endParaRPr/>
+            <a:endParaRPr dirty="0"/>
           </a:p>
         </p:txBody>
       </p:sp>
@@ -4432,7 +4552,7 @@
               <a:rPr lang="uk"/>
               <a:t>‹№›</a:t>
             </a:fld>
-            <a:endParaRPr/>
+            <a:endParaRPr dirty="0"/>
           </a:p>
         </p:txBody>
       </p:sp>
@@ -4669,7 +4789,7 @@
               <a:rPr lang="uk"/>
               <a:t>‹№›</a:t>
             </a:fld>
-            <a:endParaRPr/>
+            <a:endParaRPr dirty="0"/>
           </a:p>
         </p:txBody>
       </p:sp>
@@ -5039,7 +5159,7 @@
               <a:rPr lang="uk"/>
               <a:t>‹№›</a:t>
             </a:fld>
-            <a:endParaRPr/>
+            <a:endParaRPr dirty="0"/>
           </a:p>
         </p:txBody>
       </p:sp>
@@ -5104,7 +5224,7 @@
               </a:spcAft>
               <a:buNone/>
             </a:pPr>
-            <a:endParaRPr/>
+            <a:endParaRPr dirty="0"/>
           </a:p>
         </p:txBody>
       </p:sp>
@@ -5316,7 +5436,7 @@
               <a:rPr lang="uk"/>
               <a:t>‹№›</a:t>
             </a:fld>
-            <a:endParaRPr/>
+            <a:endParaRPr dirty="0"/>
           </a:p>
         </p:txBody>
       </p:sp>
@@ -5381,7 +5501,7 @@
               </a:spcAft>
               <a:buNone/>
             </a:pPr>
-            <a:endParaRPr/>
+            <a:endParaRPr dirty="0"/>
           </a:p>
         </p:txBody>
       </p:sp>
@@ -6128,7 +6248,7 @@
               <a:rPr lang="uk"/>
               <a:t>‹№›</a:t>
             </a:fld>
-            <a:endParaRPr/>
+            <a:endParaRPr dirty="0"/>
           </a:p>
         </p:txBody>
       </p:sp>
@@ -6286,7 +6406,7 @@
               <a:rPr lang="uk"/>
               <a:t>‹№›</a:t>
             </a:fld>
-            <a:endParaRPr/>
+            <a:endParaRPr dirty="0"/>
           </a:p>
         </p:txBody>
       </p:sp>
@@ -6983,7 +7103,7 @@
               <a:rPr lang="uk"/>
               <a:t>‹№›</a:t>
             </a:fld>
-            <a:endParaRPr/>
+            <a:endParaRPr dirty="0"/>
           </a:p>
         </p:txBody>
       </p:sp>
@@ -7845,7 +7965,7 @@
             </a:pPr>
             <a:r>
               <a:rPr lang="uk" dirty="0"/>
-              <a:t> 	06 липня 2026</a:t>
+              <a:t> 	29 червня 2026</a:t>
             </a:r>
             <a:endParaRPr dirty="0"/>
           </a:p>
@@ -8283,6 +8403,290 @@
             </a:pPr>
             <a:r>
               <a:rPr lang="uk" sz="3200" dirty="0"/>
+              <a:t>Приклад реалізації</a:t>
+            </a:r>
+            <a:endParaRPr sz="3200" dirty="0"/>
+          </a:p>
+        </p:txBody>
+      </p:sp>
+      <p:pic>
+        <p:nvPicPr>
+          <p:cNvPr id="122" name="Google Shape;122;p21"/>
+          <p:cNvPicPr preferRelativeResize="0"/>
+          <p:nvPr/>
+        </p:nvPicPr>
+        <p:blipFill>
+          <a:blip r:embed="rId3">
+            <a:alphaModFix/>
+          </a:blip>
+          <a:stretch>
+            <a:fillRect/>
+          </a:stretch>
+        </p:blipFill>
+        <p:spPr>
+          <a:xfrm>
+            <a:off x="268925" y="4359500"/>
+            <a:ext cx="862250" cy="581750"/>
+          </a:xfrm>
+          <a:prstGeom prst="rect">
+            <a:avLst/>
+          </a:prstGeom>
+          <a:noFill/>
+          <a:ln>
+            <a:noFill/>
+          </a:ln>
+        </p:spPr>
+      </p:pic>
+      <p:sp>
+        <p:nvSpPr>
+          <p:cNvPr id="2" name="TextBox 1">
+            <a:extLst>
+              <a:ext uri="{FF2B5EF4-FFF2-40B4-BE49-F238E27FC236}">
+                <a16:creationId xmlns:a16="http://schemas.microsoft.com/office/drawing/2014/main" id="{68800C66-AABB-EFA8-12F4-0C56A1243712}"/>
+              </a:ext>
+            </a:extLst>
+          </p:cNvPr>
+          <p:cNvSpPr txBox="1"/>
+          <p:nvPr/>
+        </p:nvSpPr>
+        <p:spPr>
+          <a:xfrm>
+            <a:off x="8778240" y="4606349"/>
+            <a:ext cx="284052" cy="307777"/>
+          </a:xfrm>
+          <a:prstGeom prst="rect">
+            <a:avLst/>
+          </a:prstGeom>
+          <a:noFill/>
+        </p:spPr>
+        <p:txBody>
+          <a:bodyPr wrap="none" rtlCol="0">
+            <a:spAutoFit/>
+          </a:bodyPr>
+          <a:lstStyle/>
+          <a:p>
+            <a:fld id="{A35EEF41-5B9E-4186-8855-3C8162DCC2D6}" type="slidenum">
+              <a:rPr lang="uk-UA" smtClean="0"/>
+              <a:t>10</a:t>
+            </a:fld>
+            <a:endParaRPr lang="uk-UA" dirty="0"/>
+          </a:p>
+        </p:txBody>
+      </p:sp>
+      <p:sp>
+        <p:nvSpPr>
+          <p:cNvPr id="6" name="TextBox 5">
+            <a:extLst>
+              <a:ext uri="{FF2B5EF4-FFF2-40B4-BE49-F238E27FC236}">
+                <a16:creationId xmlns:a16="http://schemas.microsoft.com/office/drawing/2014/main" id="{73621125-4FFB-7825-ABF3-714332B572A2}"/>
+              </a:ext>
+            </a:extLst>
+          </p:cNvPr>
+          <p:cNvSpPr txBox="1"/>
+          <p:nvPr/>
+        </p:nvSpPr>
+        <p:spPr>
+          <a:xfrm>
+            <a:off x="4812558" y="3078948"/>
+            <a:ext cx="3657600" cy="276999"/>
+          </a:xfrm>
+          <a:prstGeom prst="rect">
+            <a:avLst/>
+          </a:prstGeom>
+          <a:noFill/>
+        </p:spPr>
+        <p:txBody>
+          <a:bodyPr wrap="square">
+            <a:spAutoFit/>
+          </a:bodyPr>
+          <a:lstStyle/>
+          <a:p>
+            <a:pPr algn="ctr"/>
+            <a:r>
+              <a:rPr lang="uk-UA" sz="1200" dirty="0">
+                <a:latin typeface="Open Sans" panose="020B0606030504020204" pitchFamily="34" charset="0"/>
+                <a:ea typeface="Open Sans" panose="020B0606030504020204" pitchFamily="34" charset="0"/>
+                <a:cs typeface="Open Sans" panose="020B0606030504020204" pitchFamily="34" charset="0"/>
+              </a:rPr>
+              <a:t>Фрагмент інтеграції </a:t>
+            </a:r>
+            <a:r>
+              <a:rPr lang="nl-BE" sz="1200" dirty="0">
+                <a:latin typeface="Open Sans" panose="020B0606030504020204" pitchFamily="34" charset="0"/>
+                <a:ea typeface="Open Sans" panose="020B0606030504020204" pitchFamily="34" charset="0"/>
+                <a:cs typeface="Open Sans" panose="020B0606030504020204" pitchFamily="34" charset="0"/>
+              </a:rPr>
+              <a:t>OpenRouter API</a:t>
+            </a:r>
+            <a:endParaRPr lang="LID4096" sz="900" dirty="0">
+              <a:latin typeface="Open Sans" panose="020B0606030504020204" pitchFamily="34" charset="0"/>
+              <a:ea typeface="Open Sans" panose="020B0606030504020204" pitchFamily="34" charset="0"/>
+              <a:cs typeface="Open Sans" panose="020B0606030504020204" pitchFamily="34" charset="0"/>
+            </a:endParaRPr>
+          </a:p>
+        </p:txBody>
+      </p:sp>
+      <p:sp>
+        <p:nvSpPr>
+          <p:cNvPr id="9" name="TextBox 8">
+            <a:extLst>
+              <a:ext uri="{FF2B5EF4-FFF2-40B4-BE49-F238E27FC236}">
+                <a16:creationId xmlns:a16="http://schemas.microsoft.com/office/drawing/2014/main" id="{A1CE8CF9-DAAD-E074-5875-F88FA7C93AA0}"/>
+              </a:ext>
+            </a:extLst>
+          </p:cNvPr>
+          <p:cNvSpPr txBox="1"/>
+          <p:nvPr/>
+        </p:nvSpPr>
+        <p:spPr>
+          <a:xfrm>
+            <a:off x="-10235" y="3639314"/>
+            <a:ext cx="4539460" cy="461665"/>
+          </a:xfrm>
+          <a:prstGeom prst="rect">
+            <a:avLst/>
+          </a:prstGeom>
+          <a:noFill/>
+        </p:spPr>
+        <p:txBody>
+          <a:bodyPr wrap="square">
+            <a:spAutoFit/>
+          </a:bodyPr>
+          <a:lstStyle/>
+          <a:p>
+            <a:pPr algn="ctr"/>
+            <a:r>
+              <a:rPr lang="ru-RU" sz="1200" noProof="1">
+                <a:latin typeface="Open Sans" panose="020B0606030504020204" pitchFamily="34" charset="0"/>
+                <a:ea typeface="Open Sans" panose="020B0606030504020204" pitchFamily="34" charset="0"/>
+                <a:cs typeface="Open Sans" panose="020B0606030504020204" pitchFamily="34" charset="0"/>
+              </a:rPr>
+              <a:t>Фрагмент реалізації алгоритму вибору випадкової нагороди колеса фортуни</a:t>
+            </a:r>
+          </a:p>
+        </p:txBody>
+      </p:sp>
+      <p:pic>
+        <p:nvPicPr>
+          <p:cNvPr id="11" name="Рисунок 10">
+            <a:extLst>
+              <a:ext uri="{FF2B5EF4-FFF2-40B4-BE49-F238E27FC236}">
+                <a16:creationId xmlns:a16="http://schemas.microsoft.com/office/drawing/2014/main" id="{96D0049B-5DB9-7A48-61AB-1E3A295811F0}"/>
+              </a:ext>
+            </a:extLst>
+          </p:cNvPr>
+          <p:cNvPicPr>
+            <a:picLocks noChangeAspect="1"/>
+          </p:cNvPicPr>
+          <p:nvPr/>
+        </p:nvPicPr>
+        <p:blipFill>
+          <a:blip r:embed="rId4"/>
+          <a:stretch>
+            <a:fillRect/>
+          </a:stretch>
+        </p:blipFill>
+        <p:spPr>
+          <a:xfrm>
+            <a:off x="299934" y="1231519"/>
+            <a:ext cx="3943534" cy="2344276"/>
+          </a:xfrm>
+          <a:prstGeom prst="rect">
+            <a:avLst/>
+          </a:prstGeom>
+        </p:spPr>
+      </p:pic>
+      <p:pic>
+        <p:nvPicPr>
+          <p:cNvPr id="15" name="Рисунок 14">
+            <a:extLst>
+              <a:ext uri="{FF2B5EF4-FFF2-40B4-BE49-F238E27FC236}">
+                <a16:creationId xmlns:a16="http://schemas.microsoft.com/office/drawing/2014/main" id="{FCE3DED0-AA7E-B536-434F-42DD701BC59A}"/>
+              </a:ext>
+            </a:extLst>
+          </p:cNvPr>
+          <p:cNvPicPr>
+            <a:picLocks noChangeAspect="1"/>
+          </p:cNvPicPr>
+          <p:nvPr/>
+        </p:nvPicPr>
+        <p:blipFill>
+          <a:blip r:embed="rId5"/>
+          <a:stretch>
+            <a:fillRect/>
+          </a:stretch>
+        </p:blipFill>
+        <p:spPr>
+          <a:xfrm>
+            <a:off x="4425951" y="1771853"/>
+            <a:ext cx="4418115" cy="1274725"/>
+          </a:xfrm>
+          <a:prstGeom prst="rect">
+            <a:avLst/>
+          </a:prstGeom>
+        </p:spPr>
+      </p:pic>
+    </p:spTree>
+  </p:cSld>
+  <p:clrMapOvr>
+    <a:masterClrMapping/>
+  </p:clrMapOvr>
+</p:sld>
+</file>
+
+<file path=ppt/slides/slide11.xml><?xml version="1.0" encoding="utf-8"?>
+<p:sld xmlns:a="http://schemas.openxmlformats.org/drawingml/2006/main" xmlns:r="http://schemas.openxmlformats.org/officeDocument/2006/relationships" xmlns:p="http://schemas.openxmlformats.org/presentationml/2006/main">
+  <p:cSld>
+    <p:spTree>
+      <p:nvGrpSpPr>
+        <p:cNvPr id="1" name="Shape 119"/>
+        <p:cNvGrpSpPr/>
+        <p:nvPr/>
+      </p:nvGrpSpPr>
+      <p:grpSpPr>
+        <a:xfrm>
+          <a:off x="0" y="0"/>
+          <a:ext cx="0" cy="0"/>
+          <a:chOff x="0" y="0"/>
+          <a:chExt cx="0" cy="0"/>
+        </a:xfrm>
+      </p:grpSpPr>
+      <p:sp>
+        <p:nvSpPr>
+          <p:cNvPr id="120" name="Google Shape;120;p21"/>
+          <p:cNvSpPr txBox="1">
+            <a:spLocks noGrp="1"/>
+          </p:cNvSpPr>
+          <p:nvPr>
+            <p:ph type="title"/>
+          </p:nvPr>
+        </p:nvSpPr>
+        <p:spPr>
+          <a:xfrm>
+            <a:off x="268925" y="-152998"/>
+            <a:ext cx="8520600" cy="831300"/>
+          </a:xfrm>
+          <a:prstGeom prst="rect">
+            <a:avLst/>
+          </a:prstGeom>
+        </p:spPr>
+        <p:txBody>
+          <a:bodyPr spcFirstLastPara="1" wrap="square" lIns="91425" tIns="91425" rIns="91425" bIns="91425" anchor="b" anchorCtr="0">
+            <a:normAutofit/>
+          </a:bodyPr>
+          <a:lstStyle/>
+          <a:p>
+            <a:pPr marL="0" lvl="0" indent="0" algn="l" rtl="0">
+              <a:spcBef>
+                <a:spcPts val="0"/>
+              </a:spcBef>
+              <a:spcAft>
+                <a:spcPts val="0"/>
+              </a:spcAft>
+              <a:buNone/>
+            </a:pPr>
+            <a:r>
+              <a:rPr lang="uk" sz="3200" dirty="0"/>
               <a:t>Інтерфейс користувача</a:t>
             </a:r>
             <a:endParaRPr sz="3200" dirty="0"/>
@@ -8347,7 +8751,7 @@
           <a:p>
             <a:fld id="{A35EEF41-5B9E-4186-8855-3C8162DCC2D6}" type="slidenum">
               <a:rPr lang="uk-UA" smtClean="0"/>
-              <a:t>10</a:t>
+              <a:t>11</a:t>
             </a:fld>
             <a:endParaRPr lang="uk-UA" dirty="0"/>
           </a:p>
@@ -8440,7 +8844,7 @@
 </p:sld>
 </file>
 
-<file path=ppt/slides/slide11.xml><?xml version="1.0" encoding="utf-8"?>
+<file path=ppt/slides/slide12.xml><?xml version="1.0" encoding="utf-8"?>
 <p:sld xmlns:a="http://schemas.openxmlformats.org/drawingml/2006/main" xmlns:r="http://schemas.openxmlformats.org/officeDocument/2006/relationships" xmlns:p="http://schemas.openxmlformats.org/presentationml/2006/main">
   <p:cSld>
     <p:spTree>
@@ -8557,7 +8961,7 @@
           <a:p>
             <a:fld id="{A35EEF41-5B9E-4186-8855-3C8162DCC2D6}" type="slidenum">
               <a:rPr lang="uk-UA" smtClean="0"/>
-              <a:t>11</a:t>
+              <a:t>12</a:t>
             </a:fld>
             <a:endParaRPr lang="uk-UA" dirty="0"/>
           </a:p>
@@ -8666,7 +9070,7 @@
 </p:sld>
 </file>
 
-<file path=ppt/slides/slide12.xml><?xml version="1.0" encoding="utf-8"?>
+<file path=ppt/slides/slide13.xml><?xml version="1.0" encoding="utf-8"?>
 <p:sld xmlns:a="http://schemas.openxmlformats.org/drawingml/2006/main" xmlns:r="http://schemas.openxmlformats.org/officeDocument/2006/relationships" xmlns:p="http://schemas.openxmlformats.org/presentationml/2006/main">
   <p:cSld>
     <p:spTree>
@@ -8783,7 +9187,7 @@
           <a:p>
             <a:fld id="{A35EEF41-5B9E-4186-8855-3C8162DCC2D6}" type="slidenum">
               <a:rPr lang="uk-UA" smtClean="0"/>
-              <a:t>12</a:t>
+              <a:t>13</a:t>
             </a:fld>
             <a:endParaRPr lang="uk-UA" dirty="0"/>
           </a:p>
@@ -9006,7 +9410,7 @@
 </p:sld>
 </file>
 
-<file path=ppt/slides/slide13.xml><?xml version="1.0" encoding="utf-8"?>
+<file path=ppt/slides/slide14.xml><?xml version="1.0" encoding="utf-8"?>
 <p:sld xmlns:a="http://schemas.openxmlformats.org/drawingml/2006/main" xmlns:r="http://schemas.openxmlformats.org/officeDocument/2006/relationships" xmlns:p="http://schemas.openxmlformats.org/presentationml/2006/main">
   <p:cSld>
     <p:spTree>
@@ -9059,7 +9463,7 @@
             </a:pPr>
             <a:r>
               <a:rPr lang="uk" sz="3200" dirty="0"/>
-              <a:t>Підсумки </a:t>
+              <a:t>Висновки </a:t>
             </a:r>
             <a:endParaRPr sz="3200" dirty="0"/>
           </a:p>
@@ -9123,7 +9527,7 @@
           <a:p>
             <a:fld id="{A35EEF41-5B9E-4186-8855-3C8162DCC2D6}" type="slidenum">
               <a:rPr lang="uk-UA" smtClean="0"/>
-              <a:t>13</a:t>
+              <a:t>14</a:t>
             </a:fld>
             <a:endParaRPr lang="uk-UA" dirty="0"/>
           </a:p>
@@ -9176,7 +9580,7 @@
               <a:buChar char="•"/>
             </a:pPr>
             <a:r>
-              <a:rPr lang="uk-UA" sz="1800" dirty="0" err="1">
+              <a:rPr lang="uk-UA" sz="1800" noProof="1">
                 <a:latin typeface="Open Sans" panose="020B0606030504020204" pitchFamily="34" charset="0"/>
                 <a:ea typeface="Open Sans" panose="020B0606030504020204" pitchFamily="34" charset="0"/>
                 <a:cs typeface="Open Sans" panose="020B0606030504020204" pitchFamily="34" charset="0"/>
@@ -9189,23 +9593,7 @@
                 <a:ea typeface="Open Sans" panose="020B0606030504020204" pitchFamily="34" charset="0"/>
                 <a:cs typeface="Open Sans" panose="020B0606030504020204" pitchFamily="34" charset="0"/>
               </a:rPr>
-              <a:t> та реалізовано </a:t>
-            </a:r>
-            <a:r>
-              <a:rPr lang="uk-UA" sz="1800" dirty="0" err="1">
-                <a:latin typeface="Open Sans" panose="020B0606030504020204" pitchFamily="34" charset="0"/>
-                <a:ea typeface="Open Sans" panose="020B0606030504020204" pitchFamily="34" charset="0"/>
-                <a:cs typeface="Open Sans" panose="020B0606030504020204" pitchFamily="34" charset="0"/>
-              </a:rPr>
-              <a:t>вебзастосунок</a:t>
-            </a:r>
-            <a:r>
-              <a:rPr lang="uk-UA" sz="1800" dirty="0">
-                <a:latin typeface="Open Sans" panose="020B0606030504020204" pitchFamily="34" charset="0"/>
-                <a:ea typeface="Open Sans" panose="020B0606030504020204" pitchFamily="34" charset="0"/>
-                <a:cs typeface="Open Sans" panose="020B0606030504020204" pitchFamily="34" charset="0"/>
-              </a:rPr>
-              <a:t> для вивчення англійської мови з використанням </a:t>
+              <a:t> та реалізовано вебзастосунок для вивчення англійської мови з використанням </a:t>
             </a:r>
             <a:r>
               <a:rPr lang="nl-BE" sz="1800" dirty="0">
@@ -9235,23 +9623,7 @@
                 <a:ea typeface="Open Sans" panose="020B0606030504020204" pitchFamily="34" charset="0"/>
                 <a:cs typeface="Open Sans" panose="020B0606030504020204" pitchFamily="34" charset="0"/>
               </a:rPr>
-              <a:t>Реалізовано інтерактивні вправи, систему </a:t>
-            </a:r>
-            <a:r>
-              <a:rPr lang="uk-UA" sz="1800" dirty="0" err="1">
-                <a:latin typeface="Open Sans" panose="020B0606030504020204" pitchFamily="34" charset="0"/>
-                <a:ea typeface="Open Sans" panose="020B0606030504020204" pitchFamily="34" charset="0"/>
-                <a:cs typeface="Open Sans" panose="020B0606030504020204" pitchFamily="34" charset="0"/>
-              </a:rPr>
-              <a:t>гейміфікації</a:t>
-            </a:r>
-            <a:r>
-              <a:rPr lang="uk-UA" sz="1800" dirty="0">
-                <a:latin typeface="Open Sans" panose="020B0606030504020204" pitchFamily="34" charset="0"/>
-                <a:ea typeface="Open Sans" panose="020B0606030504020204" pitchFamily="34" charset="0"/>
-                <a:cs typeface="Open Sans" panose="020B0606030504020204" pitchFamily="34" charset="0"/>
-              </a:rPr>
-              <a:t> та механізм збереження прогресу користувача</a:t>
+              <a:t>Реалізовано інтерактивні вправи, систему гейміфікації та механізм збереження прогресу користувача</a:t>
             </a:r>
           </a:p>
           <a:p>
@@ -9260,108 +9632,12 @@
               <a:buChar char="•"/>
             </a:pPr>
             <a:r>
-              <a:rPr lang="ru-RU" sz="1800" dirty="0" err="1">
-                <a:latin typeface="Open Sans" panose="020B0606030504020204" pitchFamily="34" charset="0"/>
-                <a:ea typeface="Open Sans" panose="020B0606030504020204" pitchFamily="34" charset="0"/>
-                <a:cs typeface="Open Sans" panose="020B0606030504020204" pitchFamily="34" charset="0"/>
-              </a:rPr>
-              <a:t>Передбачено</a:t>
-            </a:r>
-            <a:r>
               <a:rPr lang="ru-RU" sz="1800" dirty="0">
                 <a:latin typeface="Open Sans" panose="020B0606030504020204" pitchFamily="34" charset="0"/>
                 <a:ea typeface="Open Sans" panose="020B0606030504020204" pitchFamily="34" charset="0"/>
                 <a:cs typeface="Open Sans" panose="020B0606030504020204" pitchFamily="34" charset="0"/>
               </a:rPr>
-              <a:t> </a:t>
-            </a:r>
-            <a:r>
-              <a:rPr lang="ru-RU" sz="1800" dirty="0" err="1">
-                <a:latin typeface="Open Sans" panose="020B0606030504020204" pitchFamily="34" charset="0"/>
-                <a:ea typeface="Open Sans" panose="020B0606030504020204" pitchFamily="34" charset="0"/>
-                <a:cs typeface="Open Sans" panose="020B0606030504020204" pitchFamily="34" charset="0"/>
-              </a:rPr>
-              <a:t>можливість</a:t>
-            </a:r>
-            <a:r>
-              <a:rPr lang="ru-RU" sz="1800" dirty="0">
-                <a:latin typeface="Open Sans" panose="020B0606030504020204" pitchFamily="34" charset="0"/>
-                <a:ea typeface="Open Sans" panose="020B0606030504020204" pitchFamily="34" charset="0"/>
-                <a:cs typeface="Open Sans" panose="020B0606030504020204" pitchFamily="34" charset="0"/>
-              </a:rPr>
-              <a:t> </a:t>
-            </a:r>
-            <a:r>
-              <a:rPr lang="ru-RU" sz="1800" dirty="0" err="1">
-                <a:latin typeface="Open Sans" panose="020B0606030504020204" pitchFamily="34" charset="0"/>
-                <a:ea typeface="Open Sans" panose="020B0606030504020204" pitchFamily="34" charset="0"/>
-                <a:cs typeface="Open Sans" panose="020B0606030504020204" pitchFamily="34" charset="0"/>
-              </a:rPr>
-              <a:t>подальшого</a:t>
-            </a:r>
-            <a:r>
-              <a:rPr lang="ru-RU" sz="1800" dirty="0">
-                <a:latin typeface="Open Sans" panose="020B0606030504020204" pitchFamily="34" charset="0"/>
-                <a:ea typeface="Open Sans" panose="020B0606030504020204" pitchFamily="34" charset="0"/>
-                <a:cs typeface="Open Sans" panose="020B0606030504020204" pitchFamily="34" charset="0"/>
-              </a:rPr>
-              <a:t> </a:t>
-            </a:r>
-            <a:r>
-              <a:rPr lang="ru-RU" sz="1800" dirty="0" err="1">
-                <a:latin typeface="Open Sans" panose="020B0606030504020204" pitchFamily="34" charset="0"/>
-                <a:ea typeface="Open Sans" panose="020B0606030504020204" pitchFamily="34" charset="0"/>
-                <a:cs typeface="Open Sans" panose="020B0606030504020204" pitchFamily="34" charset="0"/>
-              </a:rPr>
-              <a:t>розширення</a:t>
-            </a:r>
-            <a:r>
-              <a:rPr lang="ru-RU" sz="1800" dirty="0">
-                <a:latin typeface="Open Sans" panose="020B0606030504020204" pitchFamily="34" charset="0"/>
-                <a:ea typeface="Open Sans" panose="020B0606030504020204" pitchFamily="34" charset="0"/>
-                <a:cs typeface="Open Sans" panose="020B0606030504020204" pitchFamily="34" charset="0"/>
-              </a:rPr>
-              <a:t> </a:t>
-            </a:r>
-            <a:r>
-              <a:rPr lang="ru-RU" sz="1800" dirty="0" err="1">
-                <a:latin typeface="Open Sans" panose="020B0606030504020204" pitchFamily="34" charset="0"/>
-                <a:ea typeface="Open Sans" panose="020B0606030504020204" pitchFamily="34" charset="0"/>
-                <a:cs typeface="Open Sans" panose="020B0606030504020204" pitchFamily="34" charset="0"/>
-              </a:rPr>
-              <a:t>функціональності</a:t>
-            </a:r>
-            <a:r>
-              <a:rPr lang="ru-RU" sz="1800" dirty="0">
-                <a:latin typeface="Open Sans" panose="020B0606030504020204" pitchFamily="34" charset="0"/>
-                <a:ea typeface="Open Sans" panose="020B0606030504020204" pitchFamily="34" charset="0"/>
-                <a:cs typeface="Open Sans" panose="020B0606030504020204" pitchFamily="34" charset="0"/>
-              </a:rPr>
-              <a:t> та </a:t>
-            </a:r>
-            <a:r>
-              <a:rPr lang="ru-RU" sz="1800" dirty="0" err="1">
-                <a:latin typeface="Open Sans" panose="020B0606030504020204" pitchFamily="34" charset="0"/>
-                <a:ea typeface="Open Sans" panose="020B0606030504020204" pitchFamily="34" charset="0"/>
-                <a:cs typeface="Open Sans" panose="020B0606030504020204" pitchFamily="34" charset="0"/>
-              </a:rPr>
-              <a:t>вдосконалення</a:t>
-            </a:r>
-            <a:r>
-              <a:rPr lang="ru-RU" sz="1800" dirty="0">
-                <a:latin typeface="Open Sans" panose="020B0606030504020204" pitchFamily="34" charset="0"/>
-                <a:ea typeface="Open Sans" panose="020B0606030504020204" pitchFamily="34" charset="0"/>
-                <a:cs typeface="Open Sans" panose="020B0606030504020204" pitchFamily="34" charset="0"/>
-              </a:rPr>
-              <a:t> AI-</a:t>
-            </a:r>
-            <a:r>
-              <a:rPr lang="ru-RU" sz="1800" dirty="0" err="1">
-                <a:latin typeface="Open Sans" panose="020B0606030504020204" pitchFamily="34" charset="0"/>
-                <a:ea typeface="Open Sans" panose="020B0606030504020204" pitchFamily="34" charset="0"/>
-                <a:cs typeface="Open Sans" panose="020B0606030504020204" pitchFamily="34" charset="0"/>
-              </a:rPr>
-              <a:t>асистента</a:t>
+              <a:t>Передбачено можливість подальшого розширення функціональності та вдосконалення AI-асистента</a:t>
             </a:r>
             <a:endParaRPr lang="LID4096" sz="1800" dirty="0">
               <a:latin typeface="Open Sans" panose="020B0606030504020204" pitchFamily="34" charset="0"/>
@@ -9495,219 +9771,15 @@
             </a:r>
             <a:r>
               <a:rPr lang="ru-RU" dirty="0"/>
-              <a:t> </a:t>
-            </a:r>
-            <a:r>
-              <a:rPr lang="ru-RU" dirty="0" err="1"/>
-              <a:t>вебзастосунку</a:t>
-            </a:r>
-            <a:r>
-              <a:rPr lang="ru-RU" dirty="0"/>
-              <a:t> для </a:t>
-            </a:r>
-            <a:r>
-              <a:rPr lang="ru-RU" dirty="0" err="1"/>
-              <a:t>вивчення</a:t>
-            </a:r>
-            <a:r>
-              <a:rPr lang="ru-RU" dirty="0"/>
-              <a:t> </a:t>
-            </a:r>
-            <a:r>
-              <a:rPr lang="ru-RU" dirty="0" err="1"/>
-              <a:t>англійської</a:t>
-            </a:r>
-            <a:r>
-              <a:rPr lang="ru-RU" dirty="0"/>
-              <a:t> </a:t>
-            </a:r>
-            <a:r>
-              <a:rPr lang="ru-RU" dirty="0" err="1"/>
-              <a:t>мови</a:t>
-            </a:r>
-            <a:r>
-              <a:rPr lang="ru-RU" dirty="0"/>
-              <a:t>, яка дозволить </a:t>
-            </a:r>
-            <a:r>
-              <a:rPr lang="ru-RU" dirty="0" err="1"/>
-              <a:t>автоматизувати</a:t>
-            </a:r>
-            <a:r>
-              <a:rPr lang="ru-RU" dirty="0"/>
-              <a:t> та </a:t>
-            </a:r>
-            <a:r>
-              <a:rPr lang="ru-RU" dirty="0" err="1"/>
-              <a:t>персоналізувати</a:t>
-            </a:r>
-            <a:r>
-              <a:rPr lang="ru-RU" dirty="0"/>
-              <a:t> </a:t>
-            </a:r>
-            <a:r>
-              <a:rPr lang="ru-RU" dirty="0" err="1"/>
-              <a:t>процес</a:t>
-            </a:r>
-            <a:r>
-              <a:rPr lang="ru-RU" dirty="0"/>
-              <a:t> </a:t>
-            </a:r>
-            <a:r>
-              <a:rPr lang="ru-RU" dirty="0" err="1"/>
-              <a:t>опанування</a:t>
-            </a:r>
-            <a:r>
-              <a:rPr lang="ru-RU" dirty="0"/>
-              <a:t> </a:t>
-            </a:r>
-            <a:r>
-              <a:rPr lang="ru-RU" dirty="0" err="1"/>
-              <a:t>іноземної</a:t>
-            </a:r>
-            <a:r>
-              <a:rPr lang="ru-RU" dirty="0"/>
-              <a:t> </a:t>
-            </a:r>
-            <a:r>
-              <a:rPr lang="ru-RU" dirty="0" err="1"/>
-              <a:t>мови</a:t>
-            </a:r>
-            <a:r>
-              <a:rPr lang="ru-RU" dirty="0"/>
-              <a:t>. </a:t>
-            </a:r>
-            <a:r>
-              <a:rPr lang="ru-RU" dirty="0" err="1"/>
-              <a:t>Програмна</a:t>
-            </a:r>
-            <a:r>
-              <a:rPr lang="ru-RU" dirty="0"/>
-              <a:t> система повинна </a:t>
-            </a:r>
-            <a:r>
-              <a:rPr lang="ru-RU" dirty="0" err="1"/>
-              <a:t>забезпечити</a:t>
-            </a:r>
-            <a:r>
-              <a:rPr lang="ru-RU" dirty="0"/>
-              <a:t> </a:t>
-            </a:r>
-            <a:r>
-              <a:rPr lang="ru-RU" dirty="0" err="1"/>
-              <a:t>ефективне</a:t>
-            </a:r>
-            <a:r>
-              <a:rPr lang="ru-RU" dirty="0"/>
-              <a:t> </a:t>
-            </a:r>
-            <a:r>
-              <a:rPr lang="ru-RU" dirty="0" err="1"/>
-              <a:t>подолання</a:t>
-            </a:r>
-            <a:r>
-              <a:rPr lang="ru-RU" dirty="0"/>
-              <a:t> </a:t>
-            </a:r>
-            <a:r>
-              <a:rPr lang="ru-RU" dirty="0" err="1"/>
-              <a:t>мовного</a:t>
-            </a:r>
-            <a:r>
-              <a:rPr lang="ru-RU" dirty="0"/>
-              <a:t> </a:t>
-            </a:r>
-            <a:r>
-              <a:rPr lang="ru-RU" dirty="0" err="1"/>
-              <a:t>бар’єра</a:t>
-            </a:r>
-            <a:r>
-              <a:rPr lang="ru-RU" dirty="0"/>
-              <a:t> через </a:t>
-            </a:r>
-            <a:r>
-              <a:rPr lang="ru-RU" dirty="0" err="1"/>
-              <a:t>практичне</a:t>
-            </a:r>
-            <a:r>
-              <a:rPr lang="ru-RU" dirty="0"/>
-              <a:t> </a:t>
-            </a:r>
-            <a:r>
-              <a:rPr lang="ru-RU" dirty="0" err="1"/>
-              <a:t>спілкування</a:t>
-            </a:r>
-            <a:r>
-              <a:rPr lang="ru-RU" dirty="0"/>
-              <a:t> з </a:t>
+              <a:t> вебзастосунку для вивчення англійської мови, яка дозволить автоматизувати та персоналізувати процес опанування іноземної мови. Програмна система повинна забезпечити ефективне подолання мовного бар’єра через практичне спілкування з </a:t>
             </a:r>
             <a:r>
               <a:rPr lang="nl-BE" dirty="0"/>
               <a:t>AI-</a:t>
             </a:r>
             <a:r>
-              <a:rPr lang="ru-RU" dirty="0" err="1"/>
-              <a:t>асистентом</a:t>
-            </a:r>
-            <a:r>
               <a:rPr lang="ru-RU" dirty="0"/>
-              <a:t>, при </a:t>
-            </a:r>
-            <a:r>
-              <a:rPr lang="ru-RU" dirty="0" err="1"/>
-              <a:t>цьому</a:t>
-            </a:r>
-            <a:r>
-              <a:rPr lang="ru-RU" dirty="0"/>
-              <a:t> </a:t>
-            </a:r>
-            <a:r>
-              <a:rPr lang="ru-RU" dirty="0" err="1"/>
-              <a:t>підвищуючи</a:t>
-            </a:r>
-            <a:r>
-              <a:rPr lang="ru-RU" dirty="0"/>
-              <a:t> </a:t>
-            </a:r>
-            <a:r>
-              <a:rPr lang="ru-RU" dirty="0" err="1"/>
-              <a:t>тривалу</a:t>
-            </a:r>
-            <a:r>
-              <a:rPr lang="ru-RU" dirty="0"/>
-              <a:t> </a:t>
-            </a:r>
-            <a:r>
-              <a:rPr lang="ru-RU" dirty="0" err="1"/>
-              <a:t>мотивацію</a:t>
-            </a:r>
-            <a:r>
-              <a:rPr lang="ru-RU" dirty="0"/>
-              <a:t> </a:t>
-            </a:r>
-            <a:r>
-              <a:rPr lang="ru-RU" dirty="0" err="1"/>
-              <a:t>користувачів</a:t>
-            </a:r>
-            <a:r>
-              <a:rPr lang="ru-RU" dirty="0"/>
-              <a:t> за </a:t>
-            </a:r>
-            <a:r>
-              <a:rPr lang="ru-RU" dirty="0" err="1"/>
-              <a:t>допомогою</a:t>
-            </a:r>
-            <a:r>
-              <a:rPr lang="ru-RU" dirty="0"/>
-              <a:t> </a:t>
-            </a:r>
-            <a:r>
-              <a:rPr lang="ru-RU" dirty="0" err="1"/>
-              <a:t>ігрових</a:t>
-            </a:r>
-            <a:r>
-              <a:rPr lang="ru-RU" dirty="0"/>
-              <a:t> </a:t>
+              <a:t>асистентом, при цьому підвищуючи тривалу мотивацію користувачів за допомогою ігрових </a:t>
             </a:r>
             <a:r>
               <a:rPr lang="uk-UA" dirty="0"/>
@@ -11036,7 +11108,7 @@
   <p:cSld>
     <p:spTree>
       <p:nvGrpSpPr>
-        <p:cNvPr id="1" name="Shape 98"/>
+        <p:cNvPr id="1" name="Shape 119"/>
         <p:cNvGrpSpPr/>
         <p:nvPr/>
       </p:nvGrpSpPr>
@@ -11050,7 +11122,7 @@
       </p:grpSpPr>
       <p:sp>
         <p:nvSpPr>
-          <p:cNvPr id="99" name="Google Shape;99;p18"/>
+          <p:cNvPr id="120" name="Google Shape;120;p21"/>
           <p:cNvSpPr txBox="1">
             <a:spLocks noGrp="1"/>
           </p:cNvSpPr>
@@ -11060,7 +11132,7 @@
         </p:nvSpPr>
         <p:spPr>
           <a:xfrm>
-            <a:off x="268925" y="349659"/>
+            <a:off x="268925" y="-152998"/>
             <a:ext cx="8520600" cy="831300"/>
           </a:xfrm>
           <a:prstGeom prst="rect">
@@ -11069,7 +11141,7 @@
         </p:spPr>
         <p:txBody>
           <a:bodyPr spcFirstLastPara="1" wrap="square" lIns="91425" tIns="91425" rIns="91425" bIns="91425" anchor="b" anchorCtr="0">
-            <a:noAutofit/>
+            <a:normAutofit/>
           </a:bodyPr>
           <a:lstStyle/>
           <a:p>
@@ -11083,16 +11155,20 @@
               <a:buNone/>
             </a:pPr>
             <a:r>
-              <a:rPr lang="uk" sz="3200" dirty="0"/>
-              <a:t>Архітектура створенного програмного забезпечення</a:t>
+              <a:rPr lang="uk-UA" sz="3200" dirty="0">
+                <a:latin typeface="Economica" panose="020B0604020202020204" charset="0"/>
+              </a:rPr>
+              <a:t>Діаграма використання</a:t>
             </a:r>
-            <a:endParaRPr sz="3200" dirty="0"/>
+            <a:endParaRPr sz="3200" dirty="0">
+              <a:latin typeface="Economica" panose="020B0604020202020204" charset="0"/>
+            </a:endParaRPr>
           </a:p>
         </p:txBody>
       </p:sp>
       <p:pic>
         <p:nvPicPr>
-          <p:cNvPr id="101" name="Google Shape;101;p18"/>
+          <p:cNvPr id="122" name="Google Shape;122;p21"/>
           <p:cNvPicPr preferRelativeResize="0"/>
           <p:nvPr/>
         </p:nvPicPr>
@@ -11123,7 +11199,7 @@
           <p:cNvPr id="2" name="TextBox 1">
             <a:extLst>
               <a:ext uri="{FF2B5EF4-FFF2-40B4-BE49-F238E27FC236}">
-                <a16:creationId xmlns:a16="http://schemas.microsoft.com/office/drawing/2014/main" id="{12A55726-B906-08A2-C43F-1B00FCF5F354}"/>
+                <a16:creationId xmlns:a16="http://schemas.microsoft.com/office/drawing/2014/main" id="{68800C66-AABB-EFA8-12F4-0C56A1243712}"/>
               </a:ext>
             </a:extLst>
           </p:cNvPr>
@@ -11156,10 +11232,10 @@
       </p:sp>
       <p:pic>
         <p:nvPicPr>
-          <p:cNvPr id="5" name="Рисунок 4">
+          <p:cNvPr id="3" name="Рисунок 2">
             <a:extLst>
               <a:ext uri="{FF2B5EF4-FFF2-40B4-BE49-F238E27FC236}">
-                <a16:creationId xmlns:a16="http://schemas.microsoft.com/office/drawing/2014/main" id="{BB229437-BE42-83F8-3D83-2E9D4080F4F2}"/>
+                <a16:creationId xmlns:a16="http://schemas.microsoft.com/office/drawing/2014/main" id="{68D14BB5-B178-C21E-256B-770148BAEE79}"/>
               </a:ext>
             </a:extLst>
           </p:cNvPr>
@@ -11176,8 +11252,8 @@
         </p:blipFill>
         <p:spPr>
           <a:xfrm>
-            <a:off x="2339816" y="1180959"/>
-            <a:ext cx="4464367" cy="3672382"/>
+            <a:off x="2255823" y="678302"/>
+            <a:ext cx="4632354" cy="4282628"/>
           </a:xfrm>
           <a:prstGeom prst="rect">
             <a:avLst/>
@@ -11185,6 +11261,11 @@
         </p:spPr>
       </p:pic>
     </p:spTree>
+    <p:extLst>
+      <p:ext uri="{BB962C8B-B14F-4D97-AF65-F5344CB8AC3E}">
+        <p14:creationId xmlns:p14="http://schemas.microsoft.com/office/powerpoint/2010/main" val="724005665"/>
+      </p:ext>
+    </p:extLst>
   </p:cSld>
   <p:clrMapOvr>
     <a:masterClrMapping/>
@@ -11193,591 +11274,6 @@
 </file>
 
 <file path=ppt/slides/slide7.xml><?xml version="1.0" encoding="utf-8"?>
-<p:sld xmlns:a="http://schemas.openxmlformats.org/drawingml/2006/main" xmlns:r="http://schemas.openxmlformats.org/officeDocument/2006/relationships" xmlns:p="http://schemas.openxmlformats.org/presentationml/2006/main">
-  <p:cSld>
-    <p:spTree>
-      <p:nvGrpSpPr>
-        <p:cNvPr id="1" name="Shape 105"/>
-        <p:cNvGrpSpPr/>
-        <p:nvPr/>
-      </p:nvGrpSpPr>
-      <p:grpSpPr>
-        <a:xfrm>
-          <a:off x="0" y="0"/>
-          <a:ext cx="0" cy="0"/>
-          <a:chOff x="0" y="0"/>
-          <a:chExt cx="0" cy="0"/>
-        </a:xfrm>
-      </p:grpSpPr>
-      <p:sp>
-        <p:nvSpPr>
-          <p:cNvPr id="106" name="Google Shape;106;p19"/>
-          <p:cNvSpPr txBox="1">
-            <a:spLocks noGrp="1"/>
-          </p:cNvSpPr>
-          <p:nvPr>
-            <p:ph type="title"/>
-          </p:nvPr>
-        </p:nvSpPr>
-        <p:spPr>
-          <a:xfrm>
-            <a:off x="311700" y="312400"/>
-            <a:ext cx="8520600" cy="831300"/>
-          </a:xfrm>
-          <a:prstGeom prst="rect">
-            <a:avLst/>
-          </a:prstGeom>
-        </p:spPr>
-        <p:txBody>
-          <a:bodyPr spcFirstLastPara="1" wrap="square" lIns="91425" tIns="91425" rIns="91425" bIns="91425" anchor="b" anchorCtr="0">
-            <a:noAutofit/>
-          </a:bodyPr>
-          <a:lstStyle/>
-          <a:p>
-            <a:pPr marL="0" lvl="0" indent="0" algn="l" rtl="0">
-              <a:spcBef>
-                <a:spcPts val="0"/>
-              </a:spcBef>
-              <a:spcAft>
-                <a:spcPts val="0"/>
-              </a:spcAft>
-              <a:buNone/>
-            </a:pPr>
-            <a:r>
-              <a:rPr lang="uk" sz="3200" dirty="0"/>
-              <a:t>Опис програмного забезпечення, що було використано у дослідженні</a:t>
-            </a:r>
-            <a:endParaRPr sz="3200" dirty="0"/>
-          </a:p>
-        </p:txBody>
-      </p:sp>
-      <p:pic>
-        <p:nvPicPr>
-          <p:cNvPr id="108" name="Google Shape;108;p19"/>
-          <p:cNvPicPr preferRelativeResize="0"/>
-          <p:nvPr/>
-        </p:nvPicPr>
-        <p:blipFill>
-          <a:blip r:embed="rId3">
-            <a:alphaModFix/>
-          </a:blip>
-          <a:stretch>
-            <a:fillRect/>
-          </a:stretch>
-        </p:blipFill>
-        <p:spPr>
-          <a:xfrm>
-            <a:off x="268925" y="4359500"/>
-            <a:ext cx="862250" cy="581750"/>
-          </a:xfrm>
-          <a:prstGeom prst="rect">
-            <a:avLst/>
-          </a:prstGeom>
-          <a:noFill/>
-          <a:ln>
-            <a:noFill/>
-          </a:ln>
-        </p:spPr>
-      </p:pic>
-      <p:sp>
-        <p:nvSpPr>
-          <p:cNvPr id="2" name="TextBox 1">
-            <a:extLst>
-              <a:ext uri="{FF2B5EF4-FFF2-40B4-BE49-F238E27FC236}">
-                <a16:creationId xmlns:a16="http://schemas.microsoft.com/office/drawing/2014/main" id="{1226AFC1-F793-030A-440F-FC50C3AEF715}"/>
-              </a:ext>
-            </a:extLst>
-          </p:cNvPr>
-          <p:cNvSpPr txBox="1"/>
-          <p:nvPr/>
-        </p:nvSpPr>
-        <p:spPr>
-          <a:xfrm>
-            <a:off x="8778240" y="4606349"/>
-            <a:ext cx="284052" cy="307777"/>
-          </a:xfrm>
-          <a:prstGeom prst="rect">
-            <a:avLst/>
-          </a:prstGeom>
-          <a:noFill/>
-        </p:spPr>
-        <p:txBody>
-          <a:bodyPr wrap="none" rtlCol="0">
-            <a:spAutoFit/>
-          </a:bodyPr>
-          <a:lstStyle/>
-          <a:p>
-            <a:fld id="{A35EEF41-5B9E-4186-8855-3C8162DCC2D6}" type="slidenum">
-              <a:rPr lang="uk-UA" smtClean="0"/>
-              <a:t>7</a:t>
-            </a:fld>
-            <a:endParaRPr lang="uk-UA" dirty="0"/>
-          </a:p>
-        </p:txBody>
-      </p:sp>
-      <p:sp>
-        <p:nvSpPr>
-          <p:cNvPr id="8" name="TextBox 7">
-            <a:extLst>
-              <a:ext uri="{FF2B5EF4-FFF2-40B4-BE49-F238E27FC236}">
-                <a16:creationId xmlns:a16="http://schemas.microsoft.com/office/drawing/2014/main" id="{4AF311DB-4761-1ABE-B23B-BBCB92337F16}"/>
-              </a:ext>
-            </a:extLst>
-          </p:cNvPr>
-          <p:cNvSpPr txBox="1"/>
-          <p:nvPr/>
-        </p:nvSpPr>
-        <p:spPr>
-          <a:xfrm>
-            <a:off x="311700" y="1597438"/>
-            <a:ext cx="8159200" cy="2308324"/>
-          </a:xfrm>
-          <a:prstGeom prst="rect">
-            <a:avLst/>
-          </a:prstGeom>
-          <a:noFill/>
-        </p:spPr>
-        <p:txBody>
-          <a:bodyPr wrap="square" rtlCol="0">
-            <a:spAutoFit/>
-          </a:bodyPr>
-          <a:lstStyle/>
-          <a:p>
-            <a:pPr marL="285750" indent="-285750">
-              <a:buFont typeface="Arial" panose="020B0604020202020204" pitchFamily="34" charset="0"/>
-              <a:buChar char="•"/>
-            </a:pPr>
-            <a:r>
-              <a:rPr lang="uk-UA" sz="1800" dirty="0">
-                <a:latin typeface="Open Sans" panose="020B0606030504020204" pitchFamily="34" charset="0"/>
-                <a:ea typeface="Open Sans" panose="020B0606030504020204" pitchFamily="34" charset="0"/>
-                <a:cs typeface="Open Sans" panose="020B0606030504020204" pitchFamily="34" charset="0"/>
-              </a:rPr>
-              <a:t>Розроблено </a:t>
-            </a:r>
-            <a:r>
-              <a:rPr lang="uk-UA" sz="1800" noProof="1">
-                <a:latin typeface="Open Sans" panose="020B0606030504020204" pitchFamily="34" charset="0"/>
-                <a:ea typeface="Open Sans" panose="020B0606030504020204" pitchFamily="34" charset="0"/>
-                <a:cs typeface="Open Sans" panose="020B0606030504020204" pitchFamily="34" charset="0"/>
-              </a:rPr>
-              <a:t>вебзастосунок</a:t>
-            </a:r>
-            <a:r>
-              <a:rPr lang="uk-UA" sz="1800" dirty="0">
-                <a:latin typeface="Open Sans" panose="020B0606030504020204" pitchFamily="34" charset="0"/>
-                <a:ea typeface="Open Sans" panose="020B0606030504020204" pitchFamily="34" charset="0"/>
-                <a:cs typeface="Open Sans" panose="020B0606030504020204" pitchFamily="34" charset="0"/>
-              </a:rPr>
-              <a:t> за клієнт-серверною архітектурою</a:t>
-            </a:r>
-          </a:p>
-          <a:p>
-            <a:pPr marL="285750" indent="-285750">
-              <a:buFont typeface="Arial" panose="020B0604020202020204" pitchFamily="34" charset="0"/>
-              <a:buChar char="•"/>
-            </a:pPr>
-            <a:r>
-              <a:rPr lang="uk-UA" sz="1800" dirty="0">
-                <a:latin typeface="Open Sans" panose="020B0606030504020204" pitchFamily="34" charset="0"/>
-                <a:ea typeface="Open Sans" panose="020B0606030504020204" pitchFamily="34" charset="0"/>
-                <a:cs typeface="Open Sans" panose="020B0606030504020204" pitchFamily="34" charset="0"/>
-              </a:rPr>
-              <a:t>Реалізовано голосового та текстового </a:t>
-            </a:r>
-            <a:r>
-              <a:rPr lang="nl-BE" sz="1800" dirty="0">
-                <a:latin typeface="Open Sans" panose="020B0606030504020204" pitchFamily="34" charset="0"/>
-                <a:ea typeface="Open Sans" panose="020B0606030504020204" pitchFamily="34" charset="0"/>
-                <a:cs typeface="Open Sans" panose="020B0606030504020204" pitchFamily="34" charset="0"/>
-              </a:rPr>
-              <a:t>AI-</a:t>
-            </a:r>
-            <a:r>
-              <a:rPr lang="uk-UA" sz="1800" dirty="0">
-                <a:latin typeface="Open Sans" panose="020B0606030504020204" pitchFamily="34" charset="0"/>
-                <a:ea typeface="Open Sans" panose="020B0606030504020204" pitchFamily="34" charset="0"/>
-                <a:cs typeface="Open Sans" panose="020B0606030504020204" pitchFamily="34" charset="0"/>
-              </a:rPr>
-              <a:t>асистента</a:t>
-            </a:r>
-          </a:p>
-          <a:p>
-            <a:pPr marL="285750" indent="-285750">
-              <a:buFont typeface="Arial" panose="020B0604020202020204" pitchFamily="34" charset="0"/>
-              <a:buChar char="•"/>
-            </a:pPr>
-            <a:r>
-              <a:rPr lang="uk-UA" sz="1800" dirty="0">
-                <a:latin typeface="Open Sans" panose="020B0606030504020204" pitchFamily="34" charset="0"/>
-                <a:ea typeface="Open Sans" panose="020B0606030504020204" pitchFamily="34" charset="0"/>
-                <a:cs typeface="Open Sans" panose="020B0606030504020204" pitchFamily="34" charset="0"/>
-              </a:rPr>
-              <a:t>Створено інтерактивні навчальні вправи та систему </a:t>
-            </a:r>
-            <a:r>
-              <a:rPr lang="uk-UA" sz="1800" noProof="1">
-                <a:latin typeface="Open Sans" panose="020B0606030504020204" pitchFamily="34" charset="0"/>
-                <a:ea typeface="Open Sans" panose="020B0606030504020204" pitchFamily="34" charset="0"/>
-                <a:cs typeface="Open Sans" panose="020B0606030504020204" pitchFamily="34" charset="0"/>
-              </a:rPr>
-              <a:t>гейміфікації</a:t>
-            </a:r>
-          </a:p>
-          <a:p>
-            <a:pPr marL="285750" indent="-285750">
-              <a:buFont typeface="Arial" panose="020B0604020202020204" pitchFamily="34" charset="0"/>
-              <a:buChar char="•"/>
-            </a:pPr>
-            <a:r>
-              <a:rPr lang="uk-UA" sz="1800" dirty="0">
-                <a:latin typeface="Open Sans" panose="020B0606030504020204" pitchFamily="34" charset="0"/>
-                <a:ea typeface="Open Sans" panose="020B0606030504020204" pitchFamily="34" charset="0"/>
-                <a:cs typeface="Open Sans" panose="020B0606030504020204" pitchFamily="34" charset="0"/>
-              </a:rPr>
-              <a:t>Використано </a:t>
-            </a:r>
-            <a:r>
-              <a:rPr lang="nl-BE" sz="1800" dirty="0">
-                <a:latin typeface="Open Sans" panose="020B0606030504020204" pitchFamily="34" charset="0"/>
-                <a:ea typeface="Open Sans" panose="020B0606030504020204" pitchFamily="34" charset="0"/>
-                <a:cs typeface="Open Sans" panose="020B0606030504020204" pitchFamily="34" charset="0"/>
-              </a:rPr>
-              <a:t>JavaScript, React, Node.js, Express.js, SQLite, Sequelize ORM</a:t>
-            </a:r>
-            <a:endParaRPr lang="uk-UA" sz="1800" dirty="0">
-              <a:latin typeface="Open Sans" panose="020B0606030504020204" pitchFamily="34" charset="0"/>
-              <a:ea typeface="Open Sans" panose="020B0606030504020204" pitchFamily="34" charset="0"/>
-              <a:cs typeface="Open Sans" panose="020B0606030504020204" pitchFamily="34" charset="0"/>
-            </a:endParaRPr>
-          </a:p>
-          <a:p>
-            <a:pPr marL="285750" indent="-285750">
-              <a:buFont typeface="Arial" panose="020B0604020202020204" pitchFamily="34" charset="0"/>
-              <a:buChar char="•"/>
-            </a:pPr>
-            <a:r>
-              <a:rPr lang="uk-UA" sz="1800" dirty="0">
-                <a:latin typeface="Open Sans" panose="020B0606030504020204" pitchFamily="34" charset="0"/>
-                <a:ea typeface="Open Sans" panose="020B0606030504020204" pitchFamily="34" charset="0"/>
-                <a:cs typeface="Open Sans" panose="020B0606030504020204" pitchFamily="34" charset="0"/>
-              </a:rPr>
-              <a:t>Інтегровано </a:t>
-            </a:r>
-            <a:r>
-              <a:rPr lang="nl-BE" sz="1800" dirty="0">
-                <a:latin typeface="Open Sans" panose="020B0606030504020204" pitchFamily="34" charset="0"/>
-                <a:ea typeface="Open Sans" panose="020B0606030504020204" pitchFamily="34" charset="0"/>
-                <a:cs typeface="Open Sans" panose="020B0606030504020204" pitchFamily="34" charset="0"/>
-              </a:rPr>
-              <a:t>OpenRouter API </a:t>
-            </a:r>
-            <a:r>
-              <a:rPr lang="uk-UA" sz="1800" dirty="0">
-                <a:latin typeface="Open Sans" panose="020B0606030504020204" pitchFamily="34" charset="0"/>
-                <a:ea typeface="Open Sans" panose="020B0606030504020204" pitchFamily="34" charset="0"/>
-                <a:cs typeface="Open Sans" panose="020B0606030504020204" pitchFamily="34" charset="0"/>
-              </a:rPr>
-              <a:t>та </a:t>
-            </a:r>
-            <a:r>
-              <a:rPr lang="nl-BE" sz="1800" dirty="0">
-                <a:latin typeface="Open Sans" panose="020B0606030504020204" pitchFamily="34" charset="0"/>
-                <a:ea typeface="Open Sans" panose="020B0606030504020204" pitchFamily="34" charset="0"/>
-                <a:cs typeface="Open Sans" panose="020B0606030504020204" pitchFamily="34" charset="0"/>
-              </a:rPr>
-              <a:t>Web Speech API </a:t>
-            </a:r>
-            <a:r>
-              <a:rPr lang="uk-UA" sz="1800" dirty="0">
-                <a:latin typeface="Open Sans" panose="020B0606030504020204" pitchFamily="34" charset="0"/>
-                <a:ea typeface="Open Sans" panose="020B0606030504020204" pitchFamily="34" charset="0"/>
-                <a:cs typeface="Open Sans" panose="020B0606030504020204" pitchFamily="34" charset="0"/>
-              </a:rPr>
-              <a:t>для </a:t>
-            </a:r>
-            <a:r>
-              <a:rPr lang="nl-BE" sz="1800" dirty="0">
-                <a:latin typeface="Open Sans" panose="020B0606030504020204" pitchFamily="34" charset="0"/>
-                <a:ea typeface="Open Sans" panose="020B0606030504020204" pitchFamily="34" charset="0"/>
-                <a:cs typeface="Open Sans" panose="020B0606030504020204" pitchFamily="34" charset="0"/>
-              </a:rPr>
-              <a:t>AI </a:t>
-            </a:r>
-            <a:r>
-              <a:rPr lang="uk-UA" sz="1800" dirty="0">
-                <a:latin typeface="Open Sans" panose="020B0606030504020204" pitchFamily="34" charset="0"/>
-                <a:ea typeface="Open Sans" panose="020B0606030504020204" pitchFamily="34" charset="0"/>
-                <a:cs typeface="Open Sans" panose="020B0606030504020204" pitchFamily="34" charset="0"/>
-              </a:rPr>
-              <a:t>і голосової взаємодії</a:t>
-            </a:r>
-          </a:p>
-          <a:p>
-            <a:pPr marL="285750" indent="-285750">
-              <a:buFont typeface="Arial" panose="020B0604020202020204" pitchFamily="34" charset="0"/>
-              <a:buChar char="•"/>
-            </a:pPr>
-            <a:r>
-              <a:rPr lang="uk-UA" sz="1800" dirty="0">
-                <a:latin typeface="Open Sans" panose="020B0606030504020204" pitchFamily="34" charset="0"/>
-                <a:ea typeface="Open Sans" panose="020B0606030504020204" pitchFamily="34" charset="0"/>
-                <a:cs typeface="Open Sans" panose="020B0606030504020204" pitchFamily="34" charset="0"/>
-              </a:rPr>
-              <a:t>Проведено тестування програмної системи</a:t>
-            </a:r>
-            <a:endParaRPr lang="LID4096" dirty="0">
-              <a:latin typeface="Open Sans" panose="020B0606030504020204" pitchFamily="34" charset="0"/>
-              <a:ea typeface="Open Sans" panose="020B0606030504020204" pitchFamily="34" charset="0"/>
-              <a:cs typeface="Open Sans" panose="020B0606030504020204" pitchFamily="34" charset="0"/>
-            </a:endParaRPr>
-          </a:p>
-        </p:txBody>
-      </p:sp>
-    </p:spTree>
-  </p:cSld>
-  <p:clrMapOvr>
-    <a:masterClrMapping/>
-  </p:clrMapOvr>
-</p:sld>
-</file>
-
-<file path=ppt/slides/slide8.xml><?xml version="1.0" encoding="utf-8"?>
-<p:sld xmlns:a="http://schemas.openxmlformats.org/drawingml/2006/main" xmlns:r="http://schemas.openxmlformats.org/officeDocument/2006/relationships" xmlns:p="http://schemas.openxmlformats.org/presentationml/2006/main">
-  <p:cSld>
-    <p:spTree>
-      <p:nvGrpSpPr>
-        <p:cNvPr id="1" name="Shape 112"/>
-        <p:cNvGrpSpPr/>
-        <p:nvPr/>
-      </p:nvGrpSpPr>
-      <p:grpSpPr>
-        <a:xfrm>
-          <a:off x="0" y="0"/>
-          <a:ext cx="0" cy="0"/>
-          <a:chOff x="0" y="0"/>
-          <a:chExt cx="0" cy="0"/>
-        </a:xfrm>
-      </p:grpSpPr>
-      <p:sp>
-        <p:nvSpPr>
-          <p:cNvPr id="113" name="Google Shape;113;p20"/>
-          <p:cNvSpPr txBox="1">
-            <a:spLocks noGrp="1"/>
-          </p:cNvSpPr>
-          <p:nvPr>
-            <p:ph type="title"/>
-          </p:nvPr>
-        </p:nvSpPr>
-        <p:spPr>
-          <a:xfrm>
-            <a:off x="311700" y="-92038"/>
-            <a:ext cx="8520600" cy="831300"/>
-          </a:xfrm>
-          <a:prstGeom prst="rect">
-            <a:avLst/>
-          </a:prstGeom>
-        </p:spPr>
-        <p:txBody>
-          <a:bodyPr spcFirstLastPara="1" wrap="square" lIns="91425" tIns="91425" rIns="91425" bIns="91425" anchor="b" anchorCtr="0">
-            <a:normAutofit/>
-          </a:bodyPr>
-          <a:lstStyle/>
-          <a:p>
-            <a:pPr marL="0" lvl="0" indent="0" algn="l" rtl="0">
-              <a:spcBef>
-                <a:spcPts val="0"/>
-              </a:spcBef>
-              <a:spcAft>
-                <a:spcPts val="0"/>
-              </a:spcAft>
-              <a:buNone/>
-            </a:pPr>
-            <a:r>
-              <a:rPr lang="uk" sz="3200" dirty="0"/>
-              <a:t>Дизайн системи</a:t>
-            </a:r>
-            <a:endParaRPr sz="3200" dirty="0"/>
-          </a:p>
-        </p:txBody>
-      </p:sp>
-      <p:pic>
-        <p:nvPicPr>
-          <p:cNvPr id="115" name="Google Shape;115;p20"/>
-          <p:cNvPicPr preferRelativeResize="0"/>
-          <p:nvPr/>
-        </p:nvPicPr>
-        <p:blipFill>
-          <a:blip r:embed="rId3">
-            <a:alphaModFix/>
-          </a:blip>
-          <a:stretch>
-            <a:fillRect/>
-          </a:stretch>
-        </p:blipFill>
-        <p:spPr>
-          <a:xfrm>
-            <a:off x="268925" y="4359500"/>
-            <a:ext cx="862250" cy="581750"/>
-          </a:xfrm>
-          <a:prstGeom prst="rect">
-            <a:avLst/>
-          </a:prstGeom>
-          <a:noFill/>
-          <a:ln>
-            <a:noFill/>
-          </a:ln>
-        </p:spPr>
-      </p:pic>
-      <p:sp>
-        <p:nvSpPr>
-          <p:cNvPr id="2" name="TextBox 1">
-            <a:extLst>
-              <a:ext uri="{FF2B5EF4-FFF2-40B4-BE49-F238E27FC236}">
-                <a16:creationId xmlns:a16="http://schemas.microsoft.com/office/drawing/2014/main" id="{E8624834-013E-7249-F488-C816A0DA9355}"/>
-              </a:ext>
-            </a:extLst>
-          </p:cNvPr>
-          <p:cNvSpPr txBox="1"/>
-          <p:nvPr/>
-        </p:nvSpPr>
-        <p:spPr>
-          <a:xfrm>
-            <a:off x="8778240" y="4606349"/>
-            <a:ext cx="284052" cy="307777"/>
-          </a:xfrm>
-          <a:prstGeom prst="rect">
-            <a:avLst/>
-          </a:prstGeom>
-          <a:noFill/>
-        </p:spPr>
-        <p:txBody>
-          <a:bodyPr wrap="none" rtlCol="0">
-            <a:spAutoFit/>
-          </a:bodyPr>
-          <a:lstStyle/>
-          <a:p>
-            <a:fld id="{A35EEF41-5B9E-4186-8855-3C8162DCC2D6}" type="slidenum">
-              <a:rPr lang="uk-UA" smtClean="0"/>
-              <a:t>8</a:t>
-            </a:fld>
-            <a:endParaRPr lang="uk-UA" dirty="0"/>
-          </a:p>
-        </p:txBody>
-      </p:sp>
-      <p:sp>
-        <p:nvSpPr>
-          <p:cNvPr id="8" name="TextBox 7">
-            <a:extLst>
-              <a:ext uri="{FF2B5EF4-FFF2-40B4-BE49-F238E27FC236}">
-                <a16:creationId xmlns:a16="http://schemas.microsoft.com/office/drawing/2014/main" id="{903D4198-6C9D-C487-82F4-7DEE2A0F5113}"/>
-              </a:ext>
-            </a:extLst>
-          </p:cNvPr>
-          <p:cNvSpPr txBox="1"/>
-          <p:nvPr/>
-        </p:nvSpPr>
-        <p:spPr>
-          <a:xfrm>
-            <a:off x="311700" y="1293943"/>
-            <a:ext cx="7512050" cy="1754326"/>
-          </a:xfrm>
-          <a:prstGeom prst="rect">
-            <a:avLst/>
-          </a:prstGeom>
-          <a:noFill/>
-        </p:spPr>
-        <p:txBody>
-          <a:bodyPr wrap="square">
-            <a:spAutoFit/>
-          </a:bodyPr>
-          <a:lstStyle/>
-          <a:p>
-            <a:pPr marL="285750" indent="-285750">
-              <a:buFont typeface="Arial" panose="020B0604020202020204" pitchFamily="34" charset="0"/>
-              <a:buChar char="•"/>
-            </a:pPr>
-            <a:r>
-              <a:rPr lang="uk-UA" sz="1800" dirty="0">
-                <a:latin typeface="Open Sans" panose="020B0606030504020204" pitchFamily="34" charset="0"/>
-                <a:ea typeface="Open Sans" panose="020B0606030504020204" pitchFamily="34" charset="0"/>
-                <a:cs typeface="Open Sans" panose="020B0606030504020204" pitchFamily="34" charset="0"/>
-              </a:rPr>
-              <a:t>Інтуїтивно зрозумілий та зручний інтерфейс користувача</a:t>
-            </a:r>
-          </a:p>
-          <a:p>
-            <a:pPr marL="285750" indent="-285750">
-              <a:buFont typeface="Arial" panose="020B0604020202020204" pitchFamily="34" charset="0"/>
-              <a:buChar char="•"/>
-            </a:pPr>
-            <a:r>
-              <a:rPr lang="uk-UA" sz="1800" dirty="0">
-                <a:latin typeface="Open Sans" panose="020B0606030504020204" pitchFamily="34" charset="0"/>
-                <a:ea typeface="Open Sans" panose="020B0606030504020204" pitchFamily="34" charset="0"/>
-                <a:cs typeface="Open Sans" panose="020B0606030504020204" pitchFamily="34" charset="0"/>
-              </a:rPr>
-              <a:t>Логічна навігація між навчальними модулями</a:t>
-            </a:r>
-          </a:p>
-          <a:p>
-            <a:pPr marL="285750" indent="-285750">
-              <a:buFont typeface="Arial" panose="020B0604020202020204" pitchFamily="34" charset="0"/>
-              <a:buChar char="•"/>
-            </a:pPr>
-            <a:r>
-              <a:rPr lang="uk-UA" sz="1800" dirty="0">
-                <a:latin typeface="Open Sans" panose="020B0606030504020204" pitchFamily="34" charset="0"/>
-                <a:ea typeface="Open Sans" panose="020B0606030504020204" pitchFamily="34" charset="0"/>
-                <a:cs typeface="Open Sans" panose="020B0606030504020204" pitchFamily="34" charset="0"/>
-              </a:rPr>
-              <a:t>Компонентна побудова інтерфейсу для спрощення підтримки та розширення системи</a:t>
-            </a:r>
-          </a:p>
-          <a:p>
-            <a:pPr marL="285750" indent="-285750">
-              <a:buFont typeface="Arial" panose="020B0604020202020204" pitchFamily="34" charset="0"/>
-              <a:buChar char="•"/>
-            </a:pPr>
-            <a:r>
-              <a:rPr lang="uk-UA" sz="1800" dirty="0">
-                <a:latin typeface="Open Sans" panose="020B0606030504020204" pitchFamily="34" charset="0"/>
-                <a:ea typeface="Open Sans" panose="020B0606030504020204" pitchFamily="34" charset="0"/>
-                <a:cs typeface="Open Sans" panose="020B0606030504020204" pitchFamily="34" charset="0"/>
-              </a:rPr>
-              <a:t>Адаптивний дизайн для роботи на різних пристроях</a:t>
-            </a:r>
-          </a:p>
-          <a:p>
-            <a:pPr marL="285750" indent="-285750">
-              <a:buFont typeface="Arial" panose="020B0604020202020204" pitchFamily="34" charset="0"/>
-              <a:buChar char="•"/>
-            </a:pPr>
-            <a:r>
-              <a:rPr lang="uk-UA" sz="1800" dirty="0">
-                <a:latin typeface="Open Sans" panose="020B0606030504020204" pitchFamily="34" charset="0"/>
-                <a:ea typeface="Open Sans" panose="020B0606030504020204" pitchFamily="34" charset="0"/>
-                <a:cs typeface="Open Sans" panose="020B0606030504020204" pitchFamily="34" charset="0"/>
-              </a:rPr>
-              <a:t>Єдиний стиль оформлення всіх сторінок застосунку</a:t>
-            </a:r>
-            <a:endParaRPr lang="LID4096" dirty="0">
-              <a:latin typeface="Open Sans" panose="020B0606030504020204" pitchFamily="34" charset="0"/>
-              <a:ea typeface="Open Sans" panose="020B0606030504020204" pitchFamily="34" charset="0"/>
-              <a:cs typeface="Open Sans" panose="020B0606030504020204" pitchFamily="34" charset="0"/>
-            </a:endParaRPr>
-          </a:p>
-        </p:txBody>
-      </p:sp>
-    </p:spTree>
-  </p:cSld>
-  <p:clrMapOvr>
-    <a:masterClrMapping/>
-  </p:clrMapOvr>
-</p:sld>
-</file>
-
-<file path=ppt/slides/slide9.xml><?xml version="1.0" encoding="utf-8"?>
 <p:sld xmlns:a="http://schemas.openxmlformats.org/drawingml/2006/main" xmlns:r="http://schemas.openxmlformats.org/officeDocument/2006/relationships" xmlns:p="http://schemas.openxmlformats.org/presentationml/2006/main">
   <p:cSld>
     <p:spTree>
@@ -11829,10 +11325,13 @@
               <a:buNone/>
             </a:pPr>
             <a:r>
-              <a:rPr lang="uk" sz="3200" dirty="0"/>
-              <a:t>Приклад реалізації</a:t>
+              <a:rPr lang="nl-BE" sz="3200" dirty="0"/>
+              <a:t>ER-</a:t>
             </a:r>
-            <a:endParaRPr sz="3200" dirty="0"/>
+            <a:r>
+              <a:rPr lang="uk-UA" sz="3200" dirty="0"/>
+              <a:t>діаграма</a:t>
+            </a:r>
           </a:p>
         </p:txBody>
       </p:sp>
@@ -11894,111 +11393,18 @@
           <a:p>
             <a:fld id="{A35EEF41-5B9E-4186-8855-3C8162DCC2D6}" type="slidenum">
               <a:rPr lang="uk-UA" smtClean="0"/>
-              <a:t>9</a:t>
+              <a:t>7</a:t>
             </a:fld>
             <a:endParaRPr lang="uk-UA" dirty="0"/>
           </a:p>
         </p:txBody>
       </p:sp>
-      <p:sp>
-        <p:nvSpPr>
-          <p:cNvPr id="6" name="TextBox 5">
+      <p:pic>
+        <p:nvPicPr>
+          <p:cNvPr id="4" name="Рисунок 3">
             <a:extLst>
               <a:ext uri="{FF2B5EF4-FFF2-40B4-BE49-F238E27FC236}">
-                <a16:creationId xmlns:a16="http://schemas.microsoft.com/office/drawing/2014/main" id="{73621125-4FFB-7825-ABF3-714332B572A2}"/>
-              </a:ext>
-            </a:extLst>
-          </p:cNvPr>
-          <p:cNvSpPr txBox="1"/>
-          <p:nvPr/>
-        </p:nvSpPr>
-        <p:spPr>
-          <a:xfrm>
-            <a:off x="4812558" y="3078948"/>
-            <a:ext cx="3657600" cy="276999"/>
-          </a:xfrm>
-          <a:prstGeom prst="rect">
-            <a:avLst/>
-          </a:prstGeom>
-          <a:noFill/>
-        </p:spPr>
-        <p:txBody>
-          <a:bodyPr wrap="square">
-            <a:spAutoFit/>
-          </a:bodyPr>
-          <a:lstStyle/>
-          <a:p>
-            <a:pPr algn="ctr"/>
-            <a:r>
-              <a:rPr lang="uk-UA" sz="1200" dirty="0">
-                <a:latin typeface="Open Sans" panose="020B0606030504020204" pitchFamily="34" charset="0"/>
-                <a:ea typeface="Open Sans" panose="020B0606030504020204" pitchFamily="34" charset="0"/>
-                <a:cs typeface="Open Sans" panose="020B0606030504020204" pitchFamily="34" charset="0"/>
-              </a:rPr>
-              <a:t>Фрагмент інтеграції </a:t>
-            </a:r>
-            <a:r>
-              <a:rPr lang="nl-BE" sz="1200" dirty="0">
-                <a:latin typeface="Open Sans" panose="020B0606030504020204" pitchFamily="34" charset="0"/>
-                <a:ea typeface="Open Sans" panose="020B0606030504020204" pitchFamily="34" charset="0"/>
-                <a:cs typeface="Open Sans" panose="020B0606030504020204" pitchFamily="34" charset="0"/>
-              </a:rPr>
-              <a:t>OpenRouter API</a:t>
-            </a:r>
-            <a:endParaRPr lang="LID4096" sz="900" dirty="0">
-              <a:latin typeface="Open Sans" panose="020B0606030504020204" pitchFamily="34" charset="0"/>
-              <a:ea typeface="Open Sans" panose="020B0606030504020204" pitchFamily="34" charset="0"/>
-              <a:cs typeface="Open Sans" panose="020B0606030504020204" pitchFamily="34" charset="0"/>
-            </a:endParaRPr>
-          </a:p>
-        </p:txBody>
-      </p:sp>
-      <p:sp>
-        <p:nvSpPr>
-          <p:cNvPr id="9" name="TextBox 8">
-            <a:extLst>
-              <a:ext uri="{FF2B5EF4-FFF2-40B4-BE49-F238E27FC236}">
-                <a16:creationId xmlns:a16="http://schemas.microsoft.com/office/drawing/2014/main" id="{A1CE8CF9-DAAD-E074-5875-F88FA7C93AA0}"/>
-              </a:ext>
-            </a:extLst>
-          </p:cNvPr>
-          <p:cNvSpPr txBox="1"/>
-          <p:nvPr/>
-        </p:nvSpPr>
-        <p:spPr>
-          <a:xfrm>
-            <a:off x="-10235" y="3639314"/>
-            <a:ext cx="4539460" cy="461665"/>
-          </a:xfrm>
-          <a:prstGeom prst="rect">
-            <a:avLst/>
-          </a:prstGeom>
-          <a:noFill/>
-        </p:spPr>
-        <p:txBody>
-          <a:bodyPr wrap="square">
-            <a:spAutoFit/>
-          </a:bodyPr>
-          <a:lstStyle/>
-          <a:p>
-            <a:pPr algn="ctr"/>
-            <a:r>
-              <a:rPr lang="ru-RU" sz="1200" noProof="1">
-                <a:latin typeface="Open Sans" panose="020B0606030504020204" pitchFamily="34" charset="0"/>
-                <a:ea typeface="Open Sans" panose="020B0606030504020204" pitchFamily="34" charset="0"/>
-                <a:cs typeface="Open Sans" panose="020B0606030504020204" pitchFamily="34" charset="0"/>
-              </a:rPr>
-              <a:t>Фрагмент реалізації алгоритму вибору випадкової нагороди колеса фортуни</a:t>
-            </a:r>
-          </a:p>
-        </p:txBody>
-      </p:sp>
-      <p:pic>
-        <p:nvPicPr>
-          <p:cNvPr id="11" name="Рисунок 10">
-            <a:extLst>
-              <a:ext uri="{FF2B5EF4-FFF2-40B4-BE49-F238E27FC236}">
-                <a16:creationId xmlns:a16="http://schemas.microsoft.com/office/drawing/2014/main" id="{96D0049B-5DB9-7A48-61AB-1E3A295811F0}"/>
+                <a16:creationId xmlns:a16="http://schemas.microsoft.com/office/drawing/2014/main" id="{6BB48B77-9ACD-C961-ECE0-D2F7096B50CE}"/>
               </a:ext>
             </a:extLst>
           </p:cNvPr>
@@ -12015,20 +11421,163 @@
         </p:blipFill>
         <p:spPr>
           <a:xfrm>
-            <a:off x="299934" y="1231519"/>
-            <a:ext cx="3943534" cy="2344276"/>
+            <a:off x="2203436" y="678302"/>
+            <a:ext cx="4651578" cy="4108799"/>
           </a:xfrm>
           <a:prstGeom prst="rect">
             <a:avLst/>
           </a:prstGeom>
         </p:spPr>
       </p:pic>
+    </p:spTree>
+    <p:extLst>
+      <p:ext uri="{BB962C8B-B14F-4D97-AF65-F5344CB8AC3E}">
+        <p14:creationId xmlns:p14="http://schemas.microsoft.com/office/powerpoint/2010/main" val="2222456097"/>
+      </p:ext>
+    </p:extLst>
+  </p:cSld>
+  <p:clrMapOvr>
+    <a:masterClrMapping/>
+  </p:clrMapOvr>
+</p:sld>
+</file>
+
+<file path=ppt/slides/slide8.xml><?xml version="1.0" encoding="utf-8"?>
+<p:sld xmlns:a="http://schemas.openxmlformats.org/drawingml/2006/main" xmlns:r="http://schemas.openxmlformats.org/officeDocument/2006/relationships" xmlns:p="http://schemas.openxmlformats.org/presentationml/2006/main">
+  <p:cSld>
+    <p:spTree>
+      <p:nvGrpSpPr>
+        <p:cNvPr id="1" name="Shape 119"/>
+        <p:cNvGrpSpPr/>
+        <p:nvPr/>
+      </p:nvGrpSpPr>
+      <p:grpSpPr>
+        <a:xfrm>
+          <a:off x="0" y="0"/>
+          <a:ext cx="0" cy="0"/>
+          <a:chOff x="0" y="0"/>
+          <a:chExt cx="0" cy="0"/>
+        </a:xfrm>
+      </p:grpSpPr>
+      <p:sp>
+        <p:nvSpPr>
+          <p:cNvPr id="120" name="Google Shape;120;p21"/>
+          <p:cNvSpPr txBox="1">
+            <a:spLocks noGrp="1"/>
+          </p:cNvSpPr>
+          <p:nvPr>
+            <p:ph type="title"/>
+          </p:nvPr>
+        </p:nvSpPr>
+        <p:spPr>
+          <a:xfrm>
+            <a:off x="268925" y="-152998"/>
+            <a:ext cx="8520600" cy="831300"/>
+          </a:xfrm>
+          <a:prstGeom prst="rect">
+            <a:avLst/>
+          </a:prstGeom>
+        </p:spPr>
+        <p:txBody>
+          <a:bodyPr spcFirstLastPara="1" wrap="square" lIns="91425" tIns="91425" rIns="91425" bIns="91425" anchor="b" anchorCtr="0">
+            <a:normAutofit/>
+          </a:bodyPr>
+          <a:lstStyle/>
+          <a:p>
+            <a:pPr marL="0" lvl="0" indent="0" algn="l" rtl="0">
+              <a:spcBef>
+                <a:spcPts val="0"/>
+              </a:spcBef>
+              <a:spcAft>
+                <a:spcPts val="0"/>
+              </a:spcAft>
+              <a:buNone/>
+            </a:pPr>
+            <a:r>
+              <a:rPr lang="ru-RU" sz="3200" dirty="0"/>
+              <a:t>Д</a:t>
+            </a:r>
+            <a:r>
+              <a:rPr lang="uk-UA" sz="3200" noProof="1"/>
+              <a:t>іаграма</a:t>
+            </a:r>
+            <a:r>
+              <a:rPr lang="uk-UA" sz="3200" dirty="0"/>
+              <a:t> діяльності </a:t>
+            </a:r>
+          </a:p>
+        </p:txBody>
+      </p:sp>
       <p:pic>
         <p:nvPicPr>
-          <p:cNvPr id="15" name="Рисунок 14">
+          <p:cNvPr id="122" name="Google Shape;122;p21"/>
+          <p:cNvPicPr preferRelativeResize="0"/>
+          <p:nvPr/>
+        </p:nvPicPr>
+        <p:blipFill>
+          <a:blip r:embed="rId3">
+            <a:alphaModFix/>
+          </a:blip>
+          <a:stretch>
+            <a:fillRect/>
+          </a:stretch>
+        </p:blipFill>
+        <p:spPr>
+          <a:xfrm>
+            <a:off x="268925" y="4359500"/>
+            <a:ext cx="862250" cy="581750"/>
+          </a:xfrm>
+          <a:prstGeom prst="rect">
+            <a:avLst/>
+          </a:prstGeom>
+          <a:noFill/>
+          <a:ln>
+            <a:noFill/>
+          </a:ln>
+        </p:spPr>
+      </p:pic>
+      <p:sp>
+        <p:nvSpPr>
+          <p:cNvPr id="2" name="TextBox 1">
             <a:extLst>
               <a:ext uri="{FF2B5EF4-FFF2-40B4-BE49-F238E27FC236}">
-                <a16:creationId xmlns:a16="http://schemas.microsoft.com/office/drawing/2014/main" id="{FCE3DED0-AA7E-B536-434F-42DD701BC59A}"/>
+                <a16:creationId xmlns:a16="http://schemas.microsoft.com/office/drawing/2014/main" id="{68800C66-AABB-EFA8-12F4-0C56A1243712}"/>
+              </a:ext>
+            </a:extLst>
+          </p:cNvPr>
+          <p:cNvSpPr txBox="1"/>
+          <p:nvPr/>
+        </p:nvSpPr>
+        <p:spPr>
+          <a:xfrm>
+            <a:off x="8778240" y="4606349"/>
+            <a:ext cx="284052" cy="307777"/>
+          </a:xfrm>
+          <a:prstGeom prst="rect">
+            <a:avLst/>
+          </a:prstGeom>
+          <a:noFill/>
+        </p:spPr>
+        <p:txBody>
+          <a:bodyPr wrap="none" rtlCol="0">
+            <a:spAutoFit/>
+          </a:bodyPr>
+          <a:lstStyle/>
+          <a:p>
+            <a:fld id="{A35EEF41-5B9E-4186-8855-3C8162DCC2D6}" type="slidenum">
+              <a:rPr lang="uk-UA" smtClean="0"/>
+              <a:t>8</a:t>
+            </a:fld>
+            <a:endParaRPr lang="uk-UA" dirty="0"/>
+          </a:p>
+        </p:txBody>
+      </p:sp>
+      <p:pic>
+        <p:nvPicPr>
+          <p:cNvPr id="4" name="Рисунок 3">
+            <a:extLst>
+              <a:ext uri="{FF2B5EF4-FFF2-40B4-BE49-F238E27FC236}">
+                <a16:creationId xmlns:a16="http://schemas.microsoft.com/office/drawing/2014/main" id="{C844D865-B205-24A1-82D3-CF3E9BA82AE2}"/>
               </a:ext>
             </a:extLst>
           </p:cNvPr>
@@ -12038,15 +11587,181 @@
           <p:nvPr/>
         </p:nvPicPr>
         <p:blipFill>
-          <a:blip r:embed="rId5"/>
+          <a:blip r:embed="rId4"/>
           <a:stretch>
             <a:fillRect/>
           </a:stretch>
         </p:blipFill>
         <p:spPr>
           <a:xfrm>
-            <a:off x="4425951" y="1771853"/>
-            <a:ext cx="4418115" cy="1274725"/>
+            <a:off x="2516403" y="678302"/>
+            <a:ext cx="4111193" cy="4075378"/>
+          </a:xfrm>
+          <a:prstGeom prst="rect">
+            <a:avLst/>
+          </a:prstGeom>
+        </p:spPr>
+      </p:pic>
+    </p:spTree>
+    <p:extLst>
+      <p:ext uri="{BB962C8B-B14F-4D97-AF65-F5344CB8AC3E}">
+        <p14:creationId xmlns:p14="http://schemas.microsoft.com/office/powerpoint/2010/main" val="1215338972"/>
+      </p:ext>
+    </p:extLst>
+  </p:cSld>
+  <p:clrMapOvr>
+    <a:masterClrMapping/>
+  </p:clrMapOvr>
+</p:sld>
+</file>
+
+<file path=ppt/slides/slide9.xml><?xml version="1.0" encoding="utf-8"?>
+<p:sld xmlns:a="http://schemas.openxmlformats.org/drawingml/2006/main" xmlns:r="http://schemas.openxmlformats.org/officeDocument/2006/relationships" xmlns:p="http://schemas.openxmlformats.org/presentationml/2006/main">
+  <p:cSld>
+    <p:spTree>
+      <p:nvGrpSpPr>
+        <p:cNvPr id="1" name="Shape 98"/>
+        <p:cNvGrpSpPr/>
+        <p:nvPr/>
+      </p:nvGrpSpPr>
+      <p:grpSpPr>
+        <a:xfrm>
+          <a:off x="0" y="0"/>
+          <a:ext cx="0" cy="0"/>
+          <a:chOff x="0" y="0"/>
+          <a:chExt cx="0" cy="0"/>
+        </a:xfrm>
+      </p:grpSpPr>
+      <p:sp>
+        <p:nvSpPr>
+          <p:cNvPr id="99" name="Google Shape;99;p18"/>
+          <p:cNvSpPr txBox="1">
+            <a:spLocks noGrp="1"/>
+          </p:cNvSpPr>
+          <p:nvPr>
+            <p:ph type="title"/>
+          </p:nvPr>
+        </p:nvSpPr>
+        <p:spPr>
+          <a:xfrm>
+            <a:off x="268925" y="119122"/>
+            <a:ext cx="8520600" cy="581750"/>
+          </a:xfrm>
+          <a:prstGeom prst="rect">
+            <a:avLst/>
+          </a:prstGeom>
+        </p:spPr>
+        <p:txBody>
+          <a:bodyPr spcFirstLastPara="1" wrap="square" lIns="91425" tIns="91425" rIns="91425" bIns="91425" anchor="b" anchorCtr="0">
+            <a:noAutofit/>
+          </a:bodyPr>
+          <a:lstStyle/>
+          <a:p>
+            <a:pPr marL="0" lvl="0" indent="0" algn="l" rtl="0">
+              <a:spcBef>
+                <a:spcPts val="0"/>
+              </a:spcBef>
+              <a:spcAft>
+                <a:spcPts val="0"/>
+              </a:spcAft>
+              <a:buNone/>
+            </a:pPr>
+            <a:r>
+              <a:rPr lang="uk-UA" sz="3200" dirty="0"/>
+              <a:t>Діаграма розгортання</a:t>
+            </a:r>
+            <a:endParaRPr sz="3200" dirty="0"/>
+          </a:p>
+        </p:txBody>
+      </p:sp>
+      <p:pic>
+        <p:nvPicPr>
+          <p:cNvPr id="101" name="Google Shape;101;p18"/>
+          <p:cNvPicPr preferRelativeResize="0"/>
+          <p:nvPr/>
+        </p:nvPicPr>
+        <p:blipFill>
+          <a:blip r:embed="rId3">
+            <a:alphaModFix/>
+          </a:blip>
+          <a:stretch>
+            <a:fillRect/>
+          </a:stretch>
+        </p:blipFill>
+        <p:spPr>
+          <a:xfrm>
+            <a:off x="268925" y="4359500"/>
+            <a:ext cx="862250" cy="581750"/>
+          </a:xfrm>
+          <a:prstGeom prst="rect">
+            <a:avLst/>
+          </a:prstGeom>
+          <a:noFill/>
+          <a:ln>
+            <a:noFill/>
+          </a:ln>
+        </p:spPr>
+      </p:pic>
+      <p:sp>
+        <p:nvSpPr>
+          <p:cNvPr id="2" name="TextBox 1">
+            <a:extLst>
+              <a:ext uri="{FF2B5EF4-FFF2-40B4-BE49-F238E27FC236}">
+                <a16:creationId xmlns:a16="http://schemas.microsoft.com/office/drawing/2014/main" id="{12A55726-B906-08A2-C43F-1B00FCF5F354}"/>
+              </a:ext>
+            </a:extLst>
+          </p:cNvPr>
+          <p:cNvSpPr txBox="1"/>
+          <p:nvPr/>
+        </p:nvSpPr>
+        <p:spPr>
+          <a:xfrm>
+            <a:off x="8778240" y="4606349"/>
+            <a:ext cx="284052" cy="307777"/>
+          </a:xfrm>
+          <a:prstGeom prst="rect">
+            <a:avLst/>
+          </a:prstGeom>
+          <a:noFill/>
+        </p:spPr>
+        <p:txBody>
+          <a:bodyPr wrap="none" rtlCol="0">
+            <a:spAutoFit/>
+          </a:bodyPr>
+          <a:lstStyle/>
+          <a:p>
+            <a:fld id="{A35EEF41-5B9E-4186-8855-3C8162DCC2D6}" type="slidenum">
+              <a:rPr lang="uk-UA" smtClean="0"/>
+              <a:t>9</a:t>
+            </a:fld>
+            <a:endParaRPr lang="uk-UA" dirty="0"/>
+          </a:p>
+        </p:txBody>
+      </p:sp>
+      <p:pic>
+        <p:nvPicPr>
+          <p:cNvPr id="5" name="Рисунок 4">
+            <a:extLst>
+              <a:ext uri="{FF2B5EF4-FFF2-40B4-BE49-F238E27FC236}">
+                <a16:creationId xmlns:a16="http://schemas.microsoft.com/office/drawing/2014/main" id="{BB229437-BE42-83F8-3D83-2E9D4080F4F2}"/>
+              </a:ext>
+            </a:extLst>
+          </p:cNvPr>
+          <p:cNvPicPr>
+            <a:picLocks noChangeAspect="1"/>
+          </p:cNvPicPr>
+          <p:nvPr/>
+        </p:nvPicPr>
+        <p:blipFill>
+          <a:blip r:embed="rId4"/>
+          <a:stretch>
+            <a:fillRect/>
+          </a:stretch>
+        </p:blipFill>
+        <p:spPr>
+          <a:xfrm>
+            <a:off x="2339816" y="1180959"/>
+            <a:ext cx="4464367" cy="3672382"/>
           </a:xfrm>
           <a:prstGeom prst="rect">
             <a:avLst/>
